--- a/notebooks/Gursky_ATM.pptx
+++ b/notebooks/Gursky_ATM.pptx
@@ -224,7 +224,7 @@
           <a:p>
             <a:fld id="{868DE429-772A-4170-BA38-DDB827359B5A}" type="datetimeFigureOut">
               <a:rPr lang="ru-RU" smtClean="0"/>
-              <a:t>02.10.2025</a:t>
+              <a:t>03.10.2025</a:t>
             </a:fld>
             <a:endParaRPr lang="ru-RU"/>
           </a:p>
@@ -558,6 +558,13 @@
             <a:tailEnd type="none" w="sm" len="sm"/>
           </a:ln>
         </p:spPr>
+        <p:txBody>
+          <a:bodyPr/>
+          <a:lstStyle/>
+          <a:p>
+            <a:endParaRPr lang="ru-RU"/>
+          </a:p>
+        </p:txBody>
       </p:sp>
       <p:sp>
         <p:nvSpPr>
@@ -937,6 +944,13 @@
           </p:nvPr>
         </p:nvSpPr>
         <p:spPr/>
+        <p:txBody>
+          <a:bodyPr/>
+          <a:lstStyle/>
+          <a:p>
+            <a:endParaRPr lang="ru-RU"/>
+          </a:p>
+        </p:txBody>
       </p:sp>
       <p:sp>
         <p:nvSpPr>
@@ -1031,22 +1045,29 @@
           </p:nvPr>
         </p:nvSpPr>
         <p:spPr/>
-      </p:sp>
-      <p:sp>
-        <p:nvSpPr>
-          <p:cNvPr id="3" name="Notes Placeholder 2"/>
-          <p:cNvSpPr>
-            <a:spLocks noGrp="1"/>
-          </p:cNvSpPr>
-          <p:nvPr>
-            <p:ph type="body" sz="quarter" idx="3"/>
-          </p:nvPr>
-        </p:nvSpPr>
-        <p:spPr/>
         <p:txBody>
           <a:bodyPr/>
           <a:lstStyle/>
           <a:p>
+            <a:endParaRPr lang="ru-RU"/>
+          </a:p>
+        </p:txBody>
+      </p:sp>
+      <p:sp>
+        <p:nvSpPr>
+          <p:cNvPr id="3" name="Notes Placeholder 2"/>
+          <p:cNvSpPr>
+            <a:spLocks noGrp="1"/>
+          </p:cNvSpPr>
+          <p:nvPr>
+            <p:ph type="body" sz="quarter" idx="3"/>
+          </p:nvPr>
+        </p:nvSpPr>
+        <p:spPr/>
+        <p:txBody>
+          <a:bodyPr/>
+          <a:lstStyle/>
+          <a:p>
             <a:r>
               <a:t>CatBoost — Recall/ROC-AUC, RF — Precision/PR-AUC. Порог под бизнес-задачу.</a:t>
             </a:r>
@@ -1064,6 +1085,13 @@
           </p:nvPr>
         </p:nvSpPr>
         <p:spPr/>
+        <p:txBody>
+          <a:bodyPr/>
+          <a:lstStyle/>
+          <a:p>
+            <a:endParaRPr lang="ru-RU"/>
+          </a:p>
+        </p:txBody>
       </p:sp>
     </p:spTree>
   </p:cSld>
@@ -1101,22 +1129,29 @@
           </p:nvPr>
         </p:nvSpPr>
         <p:spPr/>
-      </p:sp>
-      <p:sp>
-        <p:nvSpPr>
-          <p:cNvPr id="3" name="Notes Placeholder 2"/>
-          <p:cNvSpPr>
-            <a:spLocks noGrp="1"/>
-          </p:cNvSpPr>
-          <p:nvPr>
-            <p:ph type="body" sz="quarter" idx="3"/>
-          </p:nvPr>
-        </p:nvSpPr>
-        <p:spPr/>
         <p:txBody>
           <a:bodyPr/>
           <a:lstStyle/>
           <a:p>
+            <a:endParaRPr lang="ru-RU"/>
+          </a:p>
+        </p:txBody>
+      </p:sp>
+      <p:sp>
+        <p:nvSpPr>
+          <p:cNvPr id="3" name="Notes Placeholder 2"/>
+          <p:cNvSpPr>
+            <a:spLocks noGrp="1"/>
+          </p:cNvSpPr>
+          <p:nvPr>
+            <p:ph type="body" sz="quarter" idx="3"/>
+          </p:nvPr>
+        </p:nvSpPr>
+        <p:spPr/>
+        <p:txBody>
+          <a:bodyPr/>
+          <a:lstStyle/>
+          <a:p>
             <a:r>
               <a:rPr dirty="0" err="1"/>
               <a:t>Итоги</a:t>
@@ -1211,6 +1246,13 @@
           </p:nvPr>
         </p:nvSpPr>
         <p:spPr/>
+        <p:txBody>
+          <a:bodyPr/>
+          <a:lstStyle/>
+          <a:p>
+            <a:endParaRPr lang="ru-RU"/>
+          </a:p>
+        </p:txBody>
       </p:sp>
     </p:spTree>
     <p:extLst>
@@ -1253,22 +1295,29 @@
           </p:nvPr>
         </p:nvSpPr>
         <p:spPr/>
-      </p:sp>
-      <p:sp>
-        <p:nvSpPr>
-          <p:cNvPr id="3" name="Notes Placeholder 2"/>
-          <p:cNvSpPr>
-            <a:spLocks noGrp="1"/>
-          </p:cNvSpPr>
-          <p:nvPr>
-            <p:ph type="body" sz="quarter" idx="3"/>
-          </p:nvPr>
-        </p:nvSpPr>
-        <p:spPr/>
         <p:txBody>
           <a:bodyPr/>
           <a:lstStyle/>
           <a:p>
+            <a:endParaRPr lang="ru-RU"/>
+          </a:p>
+        </p:txBody>
+      </p:sp>
+      <p:sp>
+        <p:nvSpPr>
+          <p:cNvPr id="3" name="Notes Placeholder 2"/>
+          <p:cNvSpPr>
+            <a:spLocks noGrp="1"/>
+          </p:cNvSpPr>
+          <p:nvPr>
+            <p:ph type="body" sz="quarter" idx="3"/>
+          </p:nvPr>
+        </p:nvSpPr>
+        <p:spPr/>
+        <p:txBody>
+          <a:bodyPr/>
+          <a:lstStyle/>
+          <a:p>
             <a:endParaRPr dirty="0"/>
           </a:p>
         </p:txBody>
@@ -1284,6 +1333,13 @@
           </p:nvPr>
         </p:nvSpPr>
         <p:spPr/>
+        <p:txBody>
+          <a:bodyPr/>
+          <a:lstStyle/>
+          <a:p>
+            <a:endParaRPr lang="ru-RU"/>
+          </a:p>
+        </p:txBody>
       </p:sp>
     </p:spTree>
   </p:cSld>
@@ -1472,7 +1528,7 @@
           <a:p>
             <a:fld id="{5BCAD085-E8A6-8845-BD4E-CB4CCA059FC4}" type="datetimeFigureOut">
               <a:rPr lang="en-US" smtClean="0"/>
-              <a:t>10/2/2025</a:t>
+              <a:t>10/3/2025</a:t>
             </a:fld>
             <a:endParaRPr lang="en-US"/>
           </a:p>
@@ -1640,7 +1696,7 @@
           <a:p>
             <a:fld id="{5BCAD085-E8A6-8845-BD4E-CB4CCA059FC4}" type="datetimeFigureOut">
               <a:rPr lang="en-US" smtClean="0"/>
-              <a:t>10/2/2025</a:t>
+              <a:t>10/3/2025</a:t>
             </a:fld>
             <a:endParaRPr lang="en-US"/>
           </a:p>
@@ -1818,7 +1874,7 @@
           <a:p>
             <a:fld id="{5BCAD085-E8A6-8845-BD4E-CB4CCA059FC4}" type="datetimeFigureOut">
               <a:rPr lang="en-US" smtClean="0"/>
-              <a:t>10/2/2025</a:t>
+              <a:t>10/3/2025</a:t>
             </a:fld>
             <a:endParaRPr lang="en-US"/>
           </a:p>
@@ -2609,7 +2665,7 @@
           <a:p>
             <a:fld id="{5BCAD085-E8A6-8845-BD4E-CB4CCA059FC4}" type="datetimeFigureOut">
               <a:rPr lang="en-US" smtClean="0"/>
-              <a:t>10/2/2025</a:t>
+              <a:t>10/3/2025</a:t>
             </a:fld>
             <a:endParaRPr lang="en-US"/>
           </a:p>
@@ -2854,7 +2910,7 @@
           <a:p>
             <a:fld id="{5BCAD085-E8A6-8845-BD4E-CB4CCA059FC4}" type="datetimeFigureOut">
               <a:rPr lang="en-US" smtClean="0"/>
-              <a:t>10/2/2025</a:t>
+              <a:t>10/3/2025</a:t>
             </a:fld>
             <a:endParaRPr lang="en-US"/>
           </a:p>
@@ -3139,7 +3195,7 @@
           <a:p>
             <a:fld id="{5BCAD085-E8A6-8845-BD4E-CB4CCA059FC4}" type="datetimeFigureOut">
               <a:rPr lang="en-US" smtClean="0"/>
-              <a:t>10/2/2025</a:t>
+              <a:t>10/3/2025</a:t>
             </a:fld>
             <a:endParaRPr lang="en-US"/>
           </a:p>
@@ -3558,7 +3614,7 @@
           <a:p>
             <a:fld id="{5BCAD085-E8A6-8845-BD4E-CB4CCA059FC4}" type="datetimeFigureOut">
               <a:rPr lang="en-US" smtClean="0"/>
-              <a:t>10/2/2025</a:t>
+              <a:t>10/3/2025</a:t>
             </a:fld>
             <a:endParaRPr lang="en-US"/>
           </a:p>
@@ -3675,7 +3731,7 @@
           <a:p>
             <a:fld id="{5BCAD085-E8A6-8845-BD4E-CB4CCA059FC4}" type="datetimeFigureOut">
               <a:rPr lang="en-US" smtClean="0"/>
-              <a:t>10/2/2025</a:t>
+              <a:t>10/3/2025</a:t>
             </a:fld>
             <a:endParaRPr lang="en-US"/>
           </a:p>
@@ -3770,7 +3826,7 @@
           <a:p>
             <a:fld id="{5BCAD085-E8A6-8845-BD4E-CB4CCA059FC4}" type="datetimeFigureOut">
               <a:rPr lang="en-US" smtClean="0"/>
-              <a:t>10/2/2025</a:t>
+              <a:t>10/3/2025</a:t>
             </a:fld>
             <a:endParaRPr lang="en-US"/>
           </a:p>
@@ -4045,7 +4101,7 @@
           <a:p>
             <a:fld id="{5BCAD085-E8A6-8845-BD4E-CB4CCA059FC4}" type="datetimeFigureOut">
               <a:rPr lang="en-US" smtClean="0"/>
-              <a:t>10/2/2025</a:t>
+              <a:t>10/3/2025</a:t>
             </a:fld>
             <a:endParaRPr lang="en-US"/>
           </a:p>
@@ -4297,7 +4353,7 @@
           <a:p>
             <a:fld id="{5BCAD085-E8A6-8845-BD4E-CB4CCA059FC4}" type="datetimeFigureOut">
               <a:rPr lang="en-US" smtClean="0"/>
-              <a:t>10/2/2025</a:t>
+              <a:t>10/3/2025</a:t>
             </a:fld>
             <a:endParaRPr lang="en-US"/>
           </a:p>
@@ -4508,7 +4564,7 @@
           <a:p>
             <a:fld id="{5BCAD085-E8A6-8845-BD4E-CB4CCA059FC4}" type="datetimeFigureOut">
               <a:rPr lang="en-US" smtClean="0"/>
-              <a:t>10/2/2025</a:t>
+              <a:t>10/3/2025</a:t>
             </a:fld>
             <a:endParaRPr lang="en-US"/>
           </a:p>
@@ -6326,7 +6382,7 @@
           <a:p>
             <a:r>
               <a:rPr lang="ru-RU" sz="3500" dirty="0"/>
-              <a:t>Метрики оценивания моделей</a:t>
+              <a:t>Метрики оценки качества моделей</a:t>
             </a:r>
           </a:p>
         </p:txBody>
@@ -6422,38 +6478,62 @@
           <a:lstStyle/>
           <a:p>
             <a:r>
+              <a:rPr lang="ru-RU" sz="1900" dirty="0" err="1"/>
+              <a:t>Accuracy</a:t>
+            </a:r>
+            <a:r>
+              <a:rPr lang="ru-RU" sz="1900" dirty="0"/>
+              <a:t> – доля правильных предсказаний.</a:t>
+            </a:r>
+          </a:p>
+          <a:p>
+            <a:r>
+              <a:rPr lang="ru-RU" sz="1900" dirty="0"/>
+              <a:t>Precision – насколько модель точна в положительных предсказаниях.</a:t>
+            </a:r>
+          </a:p>
+          <a:p>
+            <a:r>
+              <a:rPr lang="ru-RU" sz="1900" dirty="0" err="1"/>
+              <a:t>Recall</a:t>
+            </a:r>
+            <a:r>
               <a:rPr lang="ru-RU" sz="1900"/>
-              <a:t>Accuracy – доля правильных предсказаний.</a:t>
-            </a:r>
-          </a:p>
-          <a:p>
-            <a:r>
-              <a:rPr lang="ru-RU" sz="1900"/>
-              <a:t>Precision – насколько модель точна в положительных предсказаниях.</a:t>
-            </a:r>
-          </a:p>
-          <a:p>
-            <a:r>
-              <a:rPr lang="ru-RU" sz="1900"/>
-              <a:t>Recall – насколько полно модель находит все положительные объекты.</a:t>
-            </a:r>
-          </a:p>
-          <a:p>
-            <a:r>
-              <a:rPr lang="ru-RU" sz="1900"/>
-              <a:t>F1-score – баланс между Precision и Recall.</a:t>
-            </a:r>
-          </a:p>
-          <a:p>
-            <a:r>
-              <a:rPr lang="ru-RU" sz="1900"/>
+              <a:t> – насколько полно модель находит все положительные объекты.</a:t>
+            </a:r>
+          </a:p>
+          <a:p>
+            <a:r>
+              <a:rPr lang="ru-RU" sz="1900" dirty="0"/>
+              <a:t>F1-score – баланс между Precision и </a:t>
+            </a:r>
+            <a:r>
+              <a:rPr lang="ru-RU" sz="1900" dirty="0" err="1"/>
+              <a:t>Recall</a:t>
+            </a:r>
+            <a:r>
+              <a:rPr lang="ru-RU" sz="1900" dirty="0"/>
+              <a:t>.</a:t>
+            </a:r>
+          </a:p>
+          <a:p>
+            <a:r>
+              <a:rPr lang="ru-RU" sz="1900" dirty="0"/>
               <a:t>ROC-AUC – способность модели различать классы на разных порогах.</a:t>
             </a:r>
           </a:p>
           <a:p>
             <a:r>
-              <a:rPr lang="ru-RU" sz="1900"/>
-              <a:t>PR-AUC – качество модели при несбалансированных классах (Precision–Recall).</a:t>
+              <a:rPr lang="ru-RU" sz="1900" dirty="0"/>
+              <a:t>PR-AUC – качество модели при несбалансированных классах (Precision–</a:t>
+            </a:r>
+            <a:r>
+              <a:rPr lang="ru-RU" sz="1900" dirty="0" err="1"/>
+              <a:t>Recall</a:t>
+            </a:r>
+            <a:r>
+              <a:rPr lang="ru-RU" sz="1900" dirty="0"/>
+              <a:t>).</a:t>
             </a:r>
           </a:p>
         </p:txBody>
@@ -7641,7 +7721,7 @@
         </p:blipFill>
         <p:spPr bwMode="auto">
           <a:xfrm>
-            <a:off x="349758" y="3132469"/>
+            <a:off x="234694" y="3132469"/>
             <a:ext cx="4101084" cy="2552925"/>
           </a:xfrm>
           <a:prstGeom prst="rect">
@@ -7674,14 +7754,14 @@
           <p:nvPr>
             <p:extLst>
               <p:ext uri="{D42A27DB-BD31-4B8C-83A1-F6EECF244321}">
-                <p14:modId xmlns:p14="http://schemas.microsoft.com/office/powerpoint/2010/main" val="625275924"/>
+                <p14:modId xmlns:p14="http://schemas.microsoft.com/office/powerpoint/2010/main" val="2112837800"/>
               </p:ext>
             </p:extLst>
           </p:nvPr>
         </p:nvGraphicFramePr>
         <p:xfrm>
-          <a:off x="4690872" y="3364159"/>
-          <a:ext cx="4101087" cy="2089549"/>
+          <a:off x="4485894" y="3364159"/>
+          <a:ext cx="4505704" cy="2284555"/>
         </p:xfrm>
         <a:graphic>
           <a:graphicData uri="http://schemas.openxmlformats.org/drawingml/2006/table">
@@ -7694,49 +7774,49 @@
                 </a:solidFill>
               </a:tblPr>
               <a:tblGrid>
-                <a:gridCol w="690954">
+                <a:gridCol w="759124">
                   <a:extLst>
                     <a:ext uri="{9D8B030D-6E8A-4147-A177-3AD203B41FA5}">
                       <a16:colId xmlns:a16="http://schemas.microsoft.com/office/drawing/2014/main" val="1576469004"/>
                     </a:ext>
                   </a:extLst>
                 </a:gridCol>
-                <a:gridCol w="769057">
+                <a:gridCol w="624430">
                   <a:extLst>
                     <a:ext uri="{9D8B030D-6E8A-4147-A177-3AD203B41FA5}">
                       <a16:colId xmlns:a16="http://schemas.microsoft.com/office/drawing/2014/main" val="686643240"/>
                     </a:ext>
                   </a:extLst>
                 </a:gridCol>
-                <a:gridCol w="769058">
+                <a:gridCol w="624430">
                   <a:extLst>
                     <a:ext uri="{9D8B030D-6E8A-4147-A177-3AD203B41FA5}">
                       <a16:colId xmlns:a16="http://schemas.microsoft.com/office/drawing/2014/main" val="3449713388"/>
                     </a:ext>
                   </a:extLst>
                 </a:gridCol>
-                <a:gridCol w="557468">
+                <a:gridCol w="624430">
                   <a:extLst>
                     <a:ext uri="{9D8B030D-6E8A-4147-A177-3AD203B41FA5}">
                       <a16:colId xmlns:a16="http://schemas.microsoft.com/office/drawing/2014/main" val="329478297"/>
                     </a:ext>
                   </a:extLst>
                 </a:gridCol>
-                <a:gridCol w="384221">
+                <a:gridCol w="624430">
                   <a:extLst>
                     <a:ext uri="{9D8B030D-6E8A-4147-A177-3AD203B41FA5}">
                       <a16:colId xmlns:a16="http://schemas.microsoft.com/office/drawing/2014/main" val="3416278124"/>
                     </a:ext>
                   </a:extLst>
                 </a:gridCol>
-                <a:gridCol w="477945">
+                <a:gridCol w="624430">
                   <a:extLst>
                     <a:ext uri="{9D8B030D-6E8A-4147-A177-3AD203B41FA5}">
                       <a16:colId xmlns:a16="http://schemas.microsoft.com/office/drawing/2014/main" val="3120371907"/>
                     </a:ext>
                   </a:extLst>
                 </a:gridCol>
-                <a:gridCol w="452384">
+                <a:gridCol w="624430">
                   <a:extLst>
                     <a:ext uri="{9D8B030D-6E8A-4147-A177-3AD203B41FA5}">
                       <a16:colId xmlns:a16="http://schemas.microsoft.com/office/drawing/2014/main" val="3680099025"/>
@@ -7754,7 +7834,7 @@
                         <a:buNone/>
                       </a:pPr>
                       <a:r>
-                        <a:rPr lang="ru-RU" sz="1300" b="0" i="0" u="none" strike="noStrike" cap="none" spc="0">
+                        <a:rPr lang="ru-RU" sz="1300" b="0" i="0" u="none" strike="noStrike" cap="none" spc="0" dirty="0">
                           <a:solidFill>
                             <a:schemeClr val="bg1"/>
                           </a:solidFill>
@@ -7801,7 +7881,7 @@
                         <a:buNone/>
                       </a:pPr>
                       <a:r>
-                        <a:rPr lang="en-US" sz="1300" b="0" i="0" u="none" strike="noStrike" cap="none" spc="0">
+                        <a:rPr lang="en-US" sz="1300" b="0" i="0" u="none" strike="noStrike" cap="none" spc="0" dirty="0">
                           <a:solidFill>
                             <a:schemeClr val="bg1"/>
                           </a:solidFill>
@@ -7848,7 +7928,7 @@
                         <a:buNone/>
                       </a:pPr>
                       <a:r>
-                        <a:rPr lang="en-US" sz="1300" b="0" i="0" u="none" strike="noStrike" cap="none" spc="0">
+                        <a:rPr lang="en-US" sz="1300" b="0" i="0" u="none" strike="noStrike" cap="none" spc="0" dirty="0">
                           <a:solidFill>
                             <a:schemeClr val="bg1"/>
                           </a:solidFill>
@@ -7895,7 +7975,7 @@
                         <a:buNone/>
                       </a:pPr>
                       <a:r>
-                        <a:rPr lang="en-US" sz="1300" b="0" i="0" u="none" strike="noStrike" cap="none" spc="0">
+                        <a:rPr lang="en-US" sz="1300" b="0" i="0" u="none" strike="noStrike" cap="none" spc="0" dirty="0">
                           <a:solidFill>
                             <a:schemeClr val="bg1"/>
                           </a:solidFill>
@@ -8080,7 +8160,7 @@
                   </a:ext>
                 </a:extLst>
               </a:tr>
-              <a:tr h="423363">
+              <a:tr h="392313">
                 <a:tc>
                   <a:txBody>
                     <a:bodyPr/>
@@ -8090,7 +8170,7 @@
                         <a:buNone/>
                       </a:pPr>
                       <a:r>
-                        <a:rPr lang="en-US" sz="900" b="0" i="0" u="none" strike="noStrike" cap="none" spc="0">
+                        <a:rPr lang="en-US" sz="1100" b="0" i="0" u="none" strike="noStrike" cap="none" spc="0" dirty="0">
                           <a:solidFill>
                             <a:schemeClr val="tx1"/>
                           </a:solidFill>
@@ -8144,7 +8224,7 @@
                         <a:buNone/>
                       </a:pPr>
                       <a:r>
-                        <a:rPr lang="ru-RU" sz="900" b="0" i="0" u="none" strike="noStrike" cap="none" spc="0">
+                        <a:rPr lang="ru-RU" sz="1100" b="0" i="0" u="none" strike="noStrike" cap="none" spc="0">
                           <a:solidFill>
                             <a:schemeClr val="tx1"/>
                           </a:solidFill>
@@ -8198,7 +8278,7 @@
                         <a:buNone/>
                       </a:pPr>
                       <a:r>
-                        <a:rPr lang="ru-RU" sz="900" b="0" i="0" u="none" strike="noStrike" cap="none" spc="0">
+                        <a:rPr lang="ru-RU" sz="1100" b="0" i="0" u="none" strike="noStrike" cap="none" spc="0" dirty="0">
                           <a:solidFill>
                             <a:schemeClr val="tx1"/>
                           </a:solidFill>
@@ -8252,7 +8332,7 @@
                         <a:buNone/>
                       </a:pPr>
                       <a:r>
-                        <a:rPr lang="ru-RU" sz="900" b="0" i="0" u="none" strike="noStrike" cap="none" spc="0">
+                        <a:rPr lang="ru-RU" sz="1100" b="0" i="0" u="none" strike="noStrike" cap="none" spc="0" dirty="0">
                           <a:solidFill>
                             <a:schemeClr val="tx1"/>
                           </a:solidFill>
@@ -8306,7 +8386,7 @@
                         <a:buNone/>
                       </a:pPr>
                       <a:r>
-                        <a:rPr lang="ru-RU" sz="900" b="0" i="0" u="none" strike="noStrike" cap="none" spc="0">
+                        <a:rPr lang="ru-RU" sz="1100" b="0" i="0" u="none" strike="noStrike" cap="none" spc="0" dirty="0">
                           <a:solidFill>
                             <a:schemeClr val="tx1"/>
                           </a:solidFill>
@@ -8360,7 +8440,7 @@
                         <a:buNone/>
                       </a:pPr>
                       <a:r>
-                        <a:rPr lang="ru-RU" sz="900" b="0" i="0" u="none" strike="noStrike" cap="none" spc="0">
+                        <a:rPr lang="ru-RU" sz="1100" b="0" i="0" u="none" strike="noStrike" cap="none" spc="0">
                           <a:solidFill>
                             <a:schemeClr val="tx1"/>
                           </a:solidFill>
@@ -8414,7 +8494,7 @@
                         <a:buNone/>
                       </a:pPr>
                       <a:r>
-                        <a:rPr lang="ru-RU" sz="900" b="0" i="0" u="none" strike="noStrike" cap="none" spc="0">
+                        <a:rPr lang="ru-RU" sz="1100" b="0" i="0" u="none" strike="noStrike" cap="none" spc="0">
                           <a:solidFill>
                             <a:schemeClr val="tx1"/>
                           </a:solidFill>
@@ -8465,7 +8545,7 @@
                   </a:ext>
                 </a:extLst>
               </a:tr>
-              <a:tr h="423363">
+              <a:tr h="392313">
                 <a:tc>
                   <a:txBody>
                     <a:bodyPr/>
@@ -8475,7 +8555,7 @@
                         <a:buNone/>
                       </a:pPr>
                       <a:r>
-                        <a:rPr lang="en-US" sz="900" b="0" i="0" u="none" strike="noStrike" cap="none" spc="0">
+                        <a:rPr lang="en-US" sz="1100" b="0" i="0" u="none" strike="noStrike" cap="none" spc="0" dirty="0">
                           <a:solidFill>
                             <a:schemeClr val="tx1"/>
                           </a:solidFill>
@@ -8529,7 +8609,7 @@
                         <a:buNone/>
                       </a:pPr>
                       <a:r>
-                        <a:rPr lang="ru-RU" sz="900" b="0" i="0" u="none" strike="noStrike" cap="none" spc="0">
+                        <a:rPr lang="ru-RU" sz="1100" b="0" i="0" u="none" strike="noStrike" cap="none" spc="0" dirty="0">
                           <a:solidFill>
                             <a:schemeClr val="tx1"/>
                           </a:solidFill>
@@ -8583,7 +8663,7 @@
                         <a:buNone/>
                       </a:pPr>
                       <a:r>
-                        <a:rPr lang="ru-RU" sz="900" b="0" i="0" u="none" strike="noStrike" cap="none" spc="0">
+                        <a:rPr lang="ru-RU" sz="1100" b="0" i="0" u="none" strike="noStrike" cap="none" spc="0">
                           <a:solidFill>
                             <a:schemeClr val="tx1"/>
                           </a:solidFill>
@@ -8637,7 +8717,7 @@
                         <a:buNone/>
                       </a:pPr>
                       <a:r>
-                        <a:rPr lang="ru-RU" sz="900" b="0" i="0" u="none" strike="noStrike" cap="none" spc="0">
+                        <a:rPr lang="ru-RU" sz="1100" b="0" i="0" u="none" strike="noStrike" cap="none" spc="0" dirty="0">
                           <a:solidFill>
                             <a:schemeClr val="tx1"/>
                           </a:solidFill>
@@ -8691,7 +8771,7 @@
                         <a:buNone/>
                       </a:pPr>
                       <a:r>
-                        <a:rPr lang="ru-RU" sz="900" b="0" i="0" u="none" strike="noStrike" cap="none" spc="0">
+                        <a:rPr lang="ru-RU" sz="1100" b="0" i="0" u="none" strike="noStrike" cap="none" spc="0" dirty="0">
                           <a:solidFill>
                             <a:schemeClr val="tx1"/>
                           </a:solidFill>
@@ -8745,7 +8825,7 @@
                         <a:buNone/>
                       </a:pPr>
                       <a:r>
-                        <a:rPr lang="ru-RU" sz="900" b="0" i="0" u="none" strike="noStrike" cap="none" spc="0">
+                        <a:rPr lang="ru-RU" sz="1100" b="0" i="0" u="none" strike="noStrike" cap="none" spc="0" dirty="0">
                           <a:solidFill>
                             <a:schemeClr val="tx1"/>
                           </a:solidFill>
@@ -8799,7 +8879,7 @@
                         <a:buNone/>
                       </a:pPr>
                       <a:r>
-                        <a:rPr lang="ru-RU" sz="900" b="0" i="0" u="none" strike="noStrike" cap="none" spc="0">
+                        <a:rPr lang="ru-RU" sz="1100" b="0" i="0" u="none" strike="noStrike" cap="none" spc="0">
                           <a:solidFill>
                             <a:schemeClr val="tx1"/>
                           </a:solidFill>
@@ -8850,7 +8930,7 @@
                   </a:ext>
                 </a:extLst>
               </a:tr>
-              <a:tr h="423363">
+              <a:tr h="392313">
                 <a:tc>
                   <a:txBody>
                     <a:bodyPr/>
@@ -8860,7 +8940,7 @@
                         <a:buNone/>
                       </a:pPr>
                       <a:r>
-                        <a:rPr lang="en-US" sz="900" b="0" i="0" u="none" strike="noStrike" cap="none" spc="0">
+                        <a:rPr lang="en-US" sz="1100" b="0" i="0" u="none" strike="noStrike" cap="none" spc="0">
                           <a:solidFill>
                             <a:schemeClr val="tx1"/>
                           </a:solidFill>
@@ -8914,7 +8994,7 @@
                         <a:buNone/>
                       </a:pPr>
                       <a:r>
-                        <a:rPr lang="ru-RU" sz="900" b="0" i="0" u="none" strike="noStrike" cap="none" spc="0">
+                        <a:rPr lang="ru-RU" sz="1100" b="0" i="0" u="none" strike="noStrike" cap="none" spc="0">
                           <a:solidFill>
                             <a:schemeClr val="tx1"/>
                           </a:solidFill>
@@ -8968,7 +9048,7 @@
                         <a:buNone/>
                       </a:pPr>
                       <a:r>
-                        <a:rPr lang="ru-RU" sz="900" b="0" i="0" u="none" strike="noStrike" cap="none" spc="0">
+                        <a:rPr lang="ru-RU" sz="1100" b="0" i="0" u="none" strike="noStrike" cap="none" spc="0" dirty="0">
                           <a:solidFill>
                             <a:schemeClr val="tx1"/>
                           </a:solidFill>
@@ -9022,7 +9102,7 @@
                         <a:buNone/>
                       </a:pPr>
                       <a:r>
-                        <a:rPr lang="ru-RU" sz="900" b="0" i="0" u="none" strike="noStrike" cap="none" spc="0">
+                        <a:rPr lang="ru-RU" sz="1100" b="0" i="0" u="none" strike="noStrike" cap="none" spc="0">
                           <a:solidFill>
                             <a:schemeClr val="tx1"/>
                           </a:solidFill>
@@ -9076,7 +9156,7 @@
                         <a:buNone/>
                       </a:pPr>
                       <a:r>
-                        <a:rPr lang="ru-RU" sz="900" b="0" i="0" u="none" strike="noStrike" cap="none" spc="0">
+                        <a:rPr lang="ru-RU" sz="1100" b="0" i="0" u="none" strike="noStrike" cap="none" spc="0" dirty="0">
                           <a:solidFill>
                             <a:schemeClr val="tx1"/>
                           </a:solidFill>
@@ -9130,7 +9210,7 @@
                         <a:buNone/>
                       </a:pPr>
                       <a:r>
-                        <a:rPr lang="ru-RU" sz="900" b="0" i="0" u="none" strike="noStrike" cap="none" spc="0">
+                        <a:rPr lang="ru-RU" sz="1100" b="0" i="0" u="none" strike="noStrike" cap="none" spc="0" dirty="0">
                           <a:solidFill>
                             <a:schemeClr val="tx1"/>
                           </a:solidFill>
@@ -9184,7 +9264,7 @@
                         <a:buNone/>
                       </a:pPr>
                       <a:r>
-                        <a:rPr lang="ru-RU" sz="900" b="0" i="0" u="none" strike="noStrike" cap="none" spc="0">
+                        <a:rPr lang="ru-RU" sz="1100" b="0" i="0" u="none" strike="noStrike" cap="none" spc="0">
                           <a:solidFill>
                             <a:schemeClr val="tx1"/>
                           </a:solidFill>
@@ -9235,7 +9315,7 @@
                   </a:ext>
                 </a:extLst>
               </a:tr>
-              <a:tr h="287037">
+              <a:tr h="392313">
                 <a:tc>
                   <a:txBody>
                     <a:bodyPr/>
@@ -9245,7 +9325,7 @@
                         <a:buNone/>
                       </a:pPr>
                       <a:r>
-                        <a:rPr lang="en-US" sz="900" b="0" i="0" u="none" strike="noStrike" cap="none" spc="0">
+                        <a:rPr lang="en-US" sz="1100" b="0" i="0" u="none" strike="noStrike" cap="none" spc="0">
                           <a:solidFill>
                             <a:schemeClr val="tx1"/>
                           </a:solidFill>
@@ -9294,7 +9374,7 @@
                         <a:buNone/>
                       </a:pPr>
                       <a:r>
-                        <a:rPr lang="ru-RU" sz="900" b="0" i="0" u="none" strike="noStrike" cap="none" spc="0">
+                        <a:rPr lang="ru-RU" sz="1100" b="0" i="0" u="none" strike="noStrike" cap="none" spc="0">
                           <a:solidFill>
                             <a:schemeClr val="tx1"/>
                           </a:solidFill>
@@ -9343,7 +9423,7 @@
                         <a:buNone/>
                       </a:pPr>
                       <a:r>
-                        <a:rPr lang="ru-RU" sz="900" b="0" i="0" u="none" strike="noStrike" cap="none" spc="0">
+                        <a:rPr lang="ru-RU" sz="1100" b="0" i="0" u="none" strike="noStrike" cap="none" spc="0" dirty="0">
                           <a:solidFill>
                             <a:schemeClr val="tx1"/>
                           </a:solidFill>
@@ -9392,7 +9472,7 @@
                         <a:buNone/>
                       </a:pPr>
                       <a:r>
-                        <a:rPr lang="ru-RU" sz="900" b="0" i="0" u="none" strike="noStrike" cap="none" spc="0">
+                        <a:rPr lang="ru-RU" sz="1100" b="0" i="0" u="none" strike="noStrike" cap="none" spc="0" dirty="0">
                           <a:solidFill>
                             <a:schemeClr val="tx1"/>
                           </a:solidFill>
@@ -9441,7 +9521,7 @@
                         <a:buNone/>
                       </a:pPr>
                       <a:r>
-                        <a:rPr lang="ru-RU" sz="900" b="0" i="0" u="none" strike="noStrike" cap="none" spc="0">
+                        <a:rPr lang="ru-RU" sz="1100" b="0" i="0" u="none" strike="noStrike" cap="none" spc="0" dirty="0">
                           <a:solidFill>
                             <a:schemeClr val="tx1"/>
                           </a:solidFill>
@@ -9490,7 +9570,7 @@
                         <a:buNone/>
                       </a:pPr>
                       <a:r>
-                        <a:rPr lang="ru-RU" sz="900" b="0" i="0" u="none" strike="noStrike" cap="none" spc="0">
+                        <a:rPr lang="ru-RU" sz="1100" b="0" i="0" u="none" strike="noStrike" cap="none" spc="0" dirty="0">
                           <a:solidFill>
                             <a:schemeClr val="tx1"/>
                           </a:solidFill>
@@ -9539,7 +9619,7 @@
                         <a:buNone/>
                       </a:pPr>
                       <a:r>
-                        <a:rPr lang="ru-RU" sz="900" b="0" i="0" u="none" strike="noStrike" cap="none" spc="0">
+                        <a:rPr lang="ru-RU" sz="1100" b="0" i="0" u="none" strike="noStrike" cap="none" spc="0" dirty="0">
                           <a:solidFill>
                             <a:schemeClr val="tx1"/>
                           </a:solidFill>
@@ -10608,8 +10688,8 @@
         </p:blipFill>
         <p:spPr bwMode="auto">
           <a:xfrm>
-            <a:off x="4574286" y="1191718"/>
-            <a:ext cx="4094226" cy="4474563"/>
+            <a:off x="4560570" y="1210006"/>
+            <a:ext cx="4540408" cy="4962194"/>
           </a:xfrm>
           <a:prstGeom prst="rect">
             <a:avLst/>
@@ -11251,15 +11331,7 @@
             </a:pPr>
             <a:r>
               <a:rPr lang="ru-RU" sz="1500" dirty="0"/>
-              <a:t>Руководитель: </a:t>
-            </a:r>
-            <a:r>
-              <a:rPr lang="ru-RU" sz="1500" dirty="0" err="1"/>
-              <a:t>Паточенко</a:t>
-            </a:r>
-            <a:r>
-              <a:rPr lang="ru-RU" sz="1500" dirty="0"/>
-              <a:t> Евгений</a:t>
+              <a:t>Руководитель: Паточенко Евгений</a:t>
             </a:r>
           </a:p>
         </p:txBody>

--- a/notebooks/Gursky_ATM.pptx
+++ b/notebooks/Gursky_ATM.pptx
@@ -976,7 +976,14 @@
             </a:br>
             <a:r>
               <a:rPr lang="ru-RU" dirty="0"/>
-              <a:t>плотность объектов вокруг точек. Видно, что там, где стоит банкомат, инфраструктуры в 2–3 раза больше: например, по суммарным POI — 22 против 7, по кафе — 5,5 против 1,3. </a:t>
+              <a:t>плотность объектов вокруг точек. </a:t>
+            </a:r>
+            <a:br>
+              <a:rPr lang="ru-RU" dirty="0"/>
+            </a:br>
+            <a:r>
+              <a:rPr lang="ru-RU" dirty="0"/>
+              <a:t>Видно, что там, где стоит банкомат, инфраструктуры в 2–3 раза больше: например, по суммарным POI — 22 против 7, по кафе — 5,5 против 1,3. </a:t>
             </a:r>
           </a:p>
         </p:txBody>
@@ -1068,9 +1075,7 @@
           <a:bodyPr/>
           <a:lstStyle/>
           <a:p>
-            <a:r>
-              <a:t>CatBoost — Recall/ROC-AUC, RF — Precision/PR-AUC. Порог под бизнес-задачу.</a:t>
-            </a:r>
+            <a:endParaRPr dirty="0"/>
           </a:p>
         </p:txBody>
       </p:sp>
@@ -4418,9 +4423,31 @@
 <p:sldMaster xmlns:a="http://schemas.openxmlformats.org/drawingml/2006/main" xmlns:r="http://schemas.openxmlformats.org/officeDocument/2006/relationships" xmlns:p="http://schemas.openxmlformats.org/presentationml/2006/main">
   <p:cSld>
     <p:bg>
-      <p:bgRef idx="1001">
-        <a:schemeClr val="bg1"/>
-      </p:bgRef>
+      <p:bgPr>
+        <a:blipFill dpi="0" rotWithShape="1">
+          <a:blip r:embed="rId14">
+            <a:alphaModFix amt="37000"/>
+            <a:lum bright="70000" contrast="-70000"/>
+            <a:extLst>
+              <a:ext uri="{BEBA8EAE-BF5A-486C-A8C5-ECC9F3942E4B}">
+                <a14:imgProps xmlns:a14="http://schemas.microsoft.com/office/drawing/2010/main">
+                  <a14:imgLayer r:embed="rId15">
+                    <a14:imgEffect>
+                      <a14:sharpenSoften amount="28000"/>
+                    </a14:imgEffect>
+                    <a14:imgEffect>
+                      <a14:colorTemperature colorTemp="4603"/>
+                    </a14:imgEffect>
+                  </a14:imgLayer>
+                </a14:imgProps>
+              </a:ext>
+            </a:extLst>
+          </a:blip>
+          <a:srcRect/>
+          <a:tile tx="0" ty="0" sx="100000" sy="100000" flip="none" algn="br"/>
+        </a:blipFill>
+        <a:effectLst/>
+      </p:bgPr>
     </p:bg>
     <p:spTree>
       <p:nvGrpSpPr>
@@ -4982,7 +5009,7 @@
         </p:blipFill>
         <p:spPr>
           <a:xfrm>
-            <a:off x="7677016" y="1200659"/>
+            <a:off x="7791316" y="304016"/>
             <a:ext cx="860137" cy="1108802"/>
           </a:xfrm>
           <a:prstGeom prst="rect">
@@ -5057,7 +5084,7 @@
         </p:nvSpPr>
         <p:spPr>
           <a:xfrm>
-            <a:off x="2226365" y="5287738"/>
+            <a:off x="2299124" y="5841736"/>
             <a:ext cx="4572000" cy="553998"/>
           </a:xfrm>
           <a:prstGeom prst="rect">
@@ -5134,14 +5161,6 @@
 <file path=ppt/slides/slide10.xml><?xml version="1.0" encoding="utf-8"?>
 <p:sld xmlns:a="http://schemas.openxmlformats.org/drawingml/2006/main" xmlns:r="http://schemas.openxmlformats.org/officeDocument/2006/relationships" xmlns:p="http://schemas.openxmlformats.org/presentationml/2006/main">
   <p:cSld>
-    <p:bg>
-      <p:bgPr>
-        <a:solidFill>
-          <a:schemeClr val="bg1"/>
-        </a:solidFill>
-        <a:effectLst/>
-      </p:bgPr>
-    </p:bg>
     <p:spTree>
       <p:nvGrpSpPr>
         <p:cNvPr id="1" name=""/>
@@ -5612,14 +5631,6 @@
 <file path=ppt/slides/slide11.xml><?xml version="1.0" encoding="utf-8"?>
 <p:sld xmlns:a="http://schemas.openxmlformats.org/drawingml/2006/main" xmlns:r="http://schemas.openxmlformats.org/officeDocument/2006/relationships" xmlns:p="http://schemas.openxmlformats.org/presentationml/2006/main">
   <p:cSld>
-    <p:bg>
-      <p:bgPr>
-        <a:solidFill>
-          <a:schemeClr val="bg1"/>
-        </a:solidFill>
-        <a:effectLst/>
-      </p:bgPr>
-    </p:bg>
     <p:spTree>
       <p:nvGrpSpPr>
         <p:cNvPr id="1" name=""/>
@@ -6076,6 +6087,39 @@
           </a:p>
         </p:txBody>
       </p:sp>
+      <p:pic>
+        <p:nvPicPr>
+          <p:cNvPr id="4" name="Google Shape;55;p13">
+            <a:extLst>
+              <a:ext uri="{FF2B5EF4-FFF2-40B4-BE49-F238E27FC236}">
+                <a16:creationId xmlns:a16="http://schemas.microsoft.com/office/drawing/2014/main" id="{F5BF1A3F-B081-459C-31D5-07F69086BC75}"/>
+              </a:ext>
+            </a:extLst>
+          </p:cNvPr>
+          <p:cNvPicPr preferRelativeResize="0"/>
+          <p:nvPr/>
+        </p:nvPicPr>
+        <p:blipFill rotWithShape="1">
+          <a:blip r:embed="rId2">
+            <a:alphaModFix/>
+          </a:blip>
+          <a:srcRect/>
+          <a:stretch/>
+        </p:blipFill>
+        <p:spPr>
+          <a:xfrm>
+            <a:off x="7791316" y="304016"/>
+            <a:ext cx="860137" cy="1108802"/>
+          </a:xfrm>
+          <a:prstGeom prst="rect">
+            <a:avLst/>
+          </a:prstGeom>
+          <a:noFill/>
+          <a:ln>
+            <a:noFill/>
+          </a:ln>
+        </p:spPr>
+      </p:pic>
     </p:spTree>
   </p:cSld>
   <p:clrMapOvr>
@@ -6087,14 +6131,6 @@
 <file path=ppt/slides/slide12.xml><?xml version="1.0" encoding="utf-8"?>
 <p:sld xmlns:a="http://schemas.openxmlformats.org/drawingml/2006/main" xmlns:r="http://schemas.openxmlformats.org/officeDocument/2006/relationships" xmlns:p="http://schemas.openxmlformats.org/presentationml/2006/main">
   <p:cSld>
-    <p:bg>
-      <p:bgPr>
-        <a:solidFill>
-          <a:schemeClr val="bg1"/>
-        </a:solidFill>
-        <a:effectLst/>
-      </p:bgPr>
-    </p:bg>
     <p:spTree>
       <p:nvGrpSpPr>
         <p:cNvPr id="1" name=""/>
@@ -6382,7 +6418,14 @@
           <a:p>
             <a:r>
               <a:rPr lang="ru-RU" sz="3500" dirty="0"/>
-              <a:t>Метрики оценки качества моделей</a:t>
+              <a:t>Метрики оценки </a:t>
+            </a:r>
+            <a:br>
+              <a:rPr lang="ru-RU" sz="3500" dirty="0"/>
+            </a:br>
+            <a:r>
+              <a:rPr lang="ru-RU" sz="3500" dirty="0"/>
+              <a:t>качества моделей</a:t>
             </a:r>
           </a:p>
         </p:txBody>
@@ -6498,7 +6541,7 @@
               <a:t>Recall</a:t>
             </a:r>
             <a:r>
-              <a:rPr lang="ru-RU" sz="1900"/>
+              <a:rPr lang="ru-RU" sz="1900" dirty="0"/>
               <a:t> – насколько полно модель находит все положительные объекты.</a:t>
             </a:r>
           </a:p>
@@ -6538,6 +6581,39 @@
           </a:p>
         </p:txBody>
       </p:sp>
+      <p:pic>
+        <p:nvPicPr>
+          <p:cNvPr id="4" name="Google Shape;55;p13">
+            <a:extLst>
+              <a:ext uri="{FF2B5EF4-FFF2-40B4-BE49-F238E27FC236}">
+                <a16:creationId xmlns:a16="http://schemas.microsoft.com/office/drawing/2014/main" id="{E7D7842B-22BA-2F40-3356-CCFEEF24E420}"/>
+              </a:ext>
+            </a:extLst>
+          </p:cNvPr>
+          <p:cNvPicPr preferRelativeResize="0"/>
+          <p:nvPr/>
+        </p:nvPicPr>
+        <p:blipFill rotWithShape="1">
+          <a:blip r:embed="rId2">
+            <a:alphaModFix/>
+          </a:blip>
+          <a:srcRect/>
+          <a:stretch/>
+        </p:blipFill>
+        <p:spPr>
+          <a:xfrm>
+            <a:off x="7791316" y="304016"/>
+            <a:ext cx="860137" cy="1108802"/>
+          </a:xfrm>
+          <a:prstGeom prst="rect">
+            <a:avLst/>
+          </a:prstGeom>
+          <a:noFill/>
+          <a:ln>
+            <a:noFill/>
+          </a:ln>
+        </p:spPr>
+      </p:pic>
     </p:spTree>
     <p:extLst>
       <p:ext uri="{BB962C8B-B14F-4D97-AF65-F5344CB8AC3E}">
@@ -6554,14 +6630,6 @@
 <file path=ppt/slides/slide13.xml><?xml version="1.0" encoding="utf-8"?>
 <p:sld xmlns:a="http://schemas.openxmlformats.org/drawingml/2006/main" xmlns:r="http://schemas.openxmlformats.org/officeDocument/2006/relationships" xmlns:p="http://schemas.openxmlformats.org/presentationml/2006/main">
   <p:cSld>
-    <p:bg>
-      <p:bgPr>
-        <a:solidFill>
-          <a:schemeClr val="bg1"/>
-        </a:solidFill>
-        <a:effectLst/>
-      </p:bgPr>
-    </p:bg>
     <p:spTree>
       <p:nvGrpSpPr>
         <p:cNvPr id="1" name=""/>
@@ -6664,7 +6732,7 @@
               </a:lnSpc>
             </a:pPr>
             <a:r>
-              <a:rPr lang="ru-RU" sz="4700"/>
+              <a:rPr lang="ru-RU" sz="4700" dirty="0"/>
               <a:t>Матрица распределения признаков </a:t>
             </a:r>
           </a:p>
@@ -7276,6 +7344,39 @@
           </a:extLst>
         </p:spPr>
       </p:pic>
+      <p:pic>
+        <p:nvPicPr>
+          <p:cNvPr id="5" name="Google Shape;55;p13">
+            <a:extLst>
+              <a:ext uri="{FF2B5EF4-FFF2-40B4-BE49-F238E27FC236}">
+                <a16:creationId xmlns:a16="http://schemas.microsoft.com/office/drawing/2014/main" id="{A413C768-173D-0077-AFF5-DDB4D1981EEB}"/>
+              </a:ext>
+            </a:extLst>
+          </p:cNvPr>
+          <p:cNvPicPr preferRelativeResize="0"/>
+          <p:nvPr/>
+        </p:nvPicPr>
+        <p:blipFill rotWithShape="1">
+          <a:blip r:embed="rId3">
+            <a:alphaModFix/>
+          </a:blip>
+          <a:srcRect/>
+          <a:stretch/>
+        </p:blipFill>
+        <p:spPr>
+          <a:xfrm>
+            <a:off x="7979063" y="209801"/>
+            <a:ext cx="860137" cy="1108802"/>
+          </a:xfrm>
+          <a:prstGeom prst="rect">
+            <a:avLst/>
+          </a:prstGeom>
+          <a:noFill/>
+          <a:ln>
+            <a:noFill/>
+          </a:ln>
+        </p:spPr>
+      </p:pic>
     </p:spTree>
     <p:extLst>
       <p:ext uri="{BB962C8B-B14F-4D97-AF65-F5344CB8AC3E}">
@@ -7292,14 +7393,6 @@
 <file path=ppt/slides/slide14.xml><?xml version="1.0" encoding="utf-8"?>
 <p:sld xmlns:a="http://schemas.openxmlformats.org/drawingml/2006/main" xmlns:r="http://schemas.openxmlformats.org/officeDocument/2006/relationships" xmlns:p="http://schemas.openxmlformats.org/presentationml/2006/main">
   <p:cSld>
-    <p:bg>
-      <p:bgPr>
-        <a:solidFill>
-          <a:schemeClr val="bg1"/>
-        </a:solidFill>
-        <a:effectLst/>
-      </p:bgPr>
-    </p:bg>
     <p:spTree>
       <p:nvGrpSpPr>
         <p:cNvPr id="1" name=""/>
@@ -7639,7 +7732,7 @@
         <p:spPr>
           <a:xfrm>
             <a:off x="4155947" y="457200"/>
-            <a:ext cx="4505706" cy="1929384"/>
+            <a:ext cx="4505706" cy="2284554"/>
           </a:xfrm>
         </p:spPr>
         <p:txBody>
@@ -7647,16 +7740,25 @@
             <a:normAutofit/>
           </a:bodyPr>
           <a:lstStyle/>
+          <a:p>
+            <a:pPr marL="0" indent="0">
+              <a:lnSpc>
+                <a:spcPct val="90000"/>
+              </a:lnSpc>
+              <a:buNone/>
+            </a:pPr>
+            <a:r>
+              <a:rPr lang="ru-RU" sz="1800" dirty="0"/>
+              <a:t>Сравнение четырёх моделей на отложенной выборке:</a:t>
+            </a:r>
+          </a:p>
           <a:p>
             <a:pPr>
               <a:lnSpc>
                 <a:spcPct val="90000"/>
               </a:lnSpc>
             </a:pPr>
-            <a:r>
-              <a:rPr lang="ru-RU" sz="1300"/>
-              <a:t>Сравнение четырёх моделей на отложенной выборке.</a:t>
-            </a:r>
+            <a:endParaRPr lang="ru-RU" sz="1800" dirty="0"/>
           </a:p>
           <a:p>
             <a:pPr>
@@ -7665,8 +7767,28 @@
               </a:lnSpc>
             </a:pPr>
             <a:r>
-              <a:rPr lang="ru-RU" sz="1300"/>
-              <a:t>CatBoost — лучший Recall (0.754) и высокий ROC-AUC (0.868).</a:t>
+              <a:rPr lang="en-US" sz="1800" b="1" dirty="0"/>
+              <a:t>CatBoost</a:t>
+            </a:r>
+            <a:r>
+              <a:rPr lang="en-US" sz="1800" dirty="0"/>
+              <a:t> — </a:t>
+            </a:r>
+            <a:r>
+              <a:rPr lang="ru-RU" sz="1800" dirty="0"/>
+              <a:t>лучший </a:t>
+            </a:r>
+            <a:r>
+              <a:rPr lang="en-US" sz="1800" dirty="0"/>
+              <a:t>Recall (0.75) </a:t>
+            </a:r>
+            <a:r>
+              <a:rPr lang="ru-RU" sz="1800" dirty="0"/>
+              <a:t>и максимальный </a:t>
+            </a:r>
+            <a:r>
+              <a:rPr lang="en-US" sz="1800" dirty="0"/>
+              <a:t>ROC-AUC (0.87)</a:t>
             </a:r>
           </a:p>
           <a:p>
@@ -7676,19 +7798,28 @@
               </a:lnSpc>
             </a:pPr>
             <a:r>
-              <a:rPr lang="ru-RU" sz="1300"/>
-              <a:t>Random Forest — лучший Precision (0.613) и PR-AUC (0.557).</a:t>
-            </a:r>
-          </a:p>
-          <a:p>
-            <a:pPr>
-              <a:lnSpc>
-                <a:spcPct val="90000"/>
-              </a:lnSpc>
-            </a:pPr>
-            <a:r>
-              <a:rPr lang="ru-RU" sz="1300"/>
-              <a:t>Выбор метрик зависит от бизнес-приоритета: покрытие перспективных точек или точность предсказаний.</a:t>
+              <a:rPr lang="en-US" sz="1800" b="1" dirty="0"/>
+              <a:t>Random Forest</a:t>
+            </a:r>
+            <a:r>
+              <a:rPr lang="en-US" sz="1800" dirty="0"/>
+              <a:t> — </a:t>
+            </a:r>
+            <a:r>
+              <a:rPr lang="ru-RU" sz="1800" dirty="0"/>
+              <a:t>лучшая </a:t>
+            </a:r>
+            <a:r>
+              <a:rPr lang="en-US" sz="1800" dirty="0"/>
+              <a:t>Accuracy (0.88), Precision (0.61) </a:t>
+            </a:r>
+            <a:r>
+              <a:rPr lang="ru-RU" sz="1800" dirty="0"/>
+              <a:t>и </a:t>
+            </a:r>
+            <a:r>
+              <a:rPr lang="en-US" sz="1800" dirty="0"/>
+              <a:t>PR-AUC (0.56)</a:t>
             </a:r>
           </a:p>
         </p:txBody>
@@ -7754,7 +7885,7 @@
           <p:nvPr>
             <p:extLst>
               <p:ext uri="{D42A27DB-BD31-4B8C-83A1-F6EECF244321}">
-                <p14:modId xmlns:p14="http://schemas.microsoft.com/office/powerpoint/2010/main" val="2112837800"/>
+                <p14:modId xmlns:p14="http://schemas.microsoft.com/office/powerpoint/2010/main" val="1586671400"/>
               </p:ext>
             </p:extLst>
           </p:nvPr>
@@ -7834,7 +7965,7 @@
                         <a:buNone/>
                       </a:pPr>
                       <a:r>
-                        <a:rPr lang="ru-RU" sz="1300" b="0" i="0" u="none" strike="noStrike" cap="none" spc="0" dirty="0">
+                        <a:rPr lang="ru-RU" sz="1200" b="1" i="0" u="none" strike="noStrike" cap="none" spc="0" dirty="0">
                           <a:solidFill>
                             <a:schemeClr val="bg1"/>
                           </a:solidFill>
@@ -7881,7 +8012,7 @@
                         <a:buNone/>
                       </a:pPr>
                       <a:r>
-                        <a:rPr lang="en-US" sz="1300" b="0" i="0" u="none" strike="noStrike" cap="none" spc="0" dirty="0">
+                        <a:rPr lang="en-US" sz="1200" b="1" i="0" u="none" strike="noStrike" cap="none" spc="0" dirty="0">
                           <a:solidFill>
                             <a:schemeClr val="bg1"/>
                           </a:solidFill>
@@ -7913,6 +8044,9 @@
                         </a:schemeClr>
                       </a:solidFill>
                       <a:prstDash val="solid"/>
+                      <a:round/>
+                      <a:headEnd type="none" w="med" len="med"/>
+                      <a:tailEnd type="none" w="med" len="med"/>
                     </a:lnB>
                     <a:solidFill>
                       <a:schemeClr val="accent2"/>
@@ -7928,7 +8062,7 @@
                         <a:buNone/>
                       </a:pPr>
                       <a:r>
-                        <a:rPr lang="en-US" sz="1300" b="0" i="0" u="none" strike="noStrike" cap="none" spc="0" dirty="0">
+                        <a:rPr lang="en-US" sz="1200" b="1" i="0" u="none" strike="noStrike" cap="none" spc="0" dirty="0">
                           <a:solidFill>
                             <a:schemeClr val="bg1"/>
                           </a:solidFill>
@@ -7960,6 +8094,9 @@
                         </a:schemeClr>
                       </a:solidFill>
                       <a:prstDash val="solid"/>
+                      <a:round/>
+                      <a:headEnd type="none" w="med" len="med"/>
+                      <a:tailEnd type="none" w="med" len="med"/>
                     </a:lnB>
                     <a:solidFill>
                       <a:schemeClr val="accent2"/>
@@ -7975,7 +8112,7 @@
                         <a:buNone/>
                       </a:pPr>
                       <a:r>
-                        <a:rPr lang="en-US" sz="1300" b="0" i="0" u="none" strike="noStrike" cap="none" spc="0" dirty="0">
+                        <a:rPr lang="en-US" sz="1200" b="1" i="0" u="none" strike="noStrike" cap="none" spc="0" dirty="0">
                           <a:solidFill>
                             <a:schemeClr val="bg1"/>
                           </a:solidFill>
@@ -8007,6 +8144,9 @@
                         </a:schemeClr>
                       </a:solidFill>
                       <a:prstDash val="solid"/>
+                      <a:round/>
+                      <a:headEnd type="none" w="med" len="med"/>
+                      <a:tailEnd type="none" w="med" len="med"/>
                     </a:lnB>
                     <a:solidFill>
                       <a:schemeClr val="accent2"/>
@@ -8022,7 +8162,7 @@
                         <a:buNone/>
                       </a:pPr>
                       <a:r>
-                        <a:rPr lang="en-US" sz="1300" b="0" i="0" u="none" strike="noStrike" cap="none" spc="0">
+                        <a:rPr lang="en-US" sz="1200" b="1" i="0" u="none" strike="noStrike" cap="none" spc="0" dirty="0">
                           <a:solidFill>
                             <a:schemeClr val="bg1"/>
                           </a:solidFill>
@@ -8054,6 +8194,9 @@
                         </a:schemeClr>
                       </a:solidFill>
                       <a:prstDash val="solid"/>
+                      <a:round/>
+                      <a:headEnd type="none" w="med" len="med"/>
+                      <a:tailEnd type="none" w="med" len="med"/>
                     </a:lnB>
                     <a:solidFill>
                       <a:schemeClr val="accent2"/>
@@ -8069,7 +8212,7 @@
                         <a:buNone/>
                       </a:pPr>
                       <a:r>
-                        <a:rPr lang="en-US" sz="1300" b="0" i="0" u="none" strike="noStrike" cap="none" spc="0">
+                        <a:rPr lang="en-US" sz="1200" b="1" i="0" u="none" strike="noStrike" cap="none" spc="0" dirty="0">
                           <a:solidFill>
                             <a:schemeClr val="bg1"/>
                           </a:solidFill>
@@ -8101,6 +8244,9 @@
                         </a:schemeClr>
                       </a:solidFill>
                       <a:prstDash val="solid"/>
+                      <a:round/>
+                      <a:headEnd type="none" w="med" len="med"/>
+                      <a:tailEnd type="none" w="med" len="med"/>
                     </a:lnB>
                     <a:solidFill>
                       <a:schemeClr val="accent2"/>
@@ -8116,7 +8262,7 @@
                         <a:buNone/>
                       </a:pPr>
                       <a:r>
-                        <a:rPr lang="en-US" sz="1300" b="0" i="0" u="none" strike="noStrike" cap="none" spc="0">
+                        <a:rPr lang="en-US" sz="1200" b="1" i="0" u="none" strike="noStrike" cap="none" spc="0" dirty="0">
                           <a:solidFill>
                             <a:schemeClr val="bg1"/>
                           </a:solidFill>
@@ -8148,6 +8294,9 @@
                         </a:schemeClr>
                       </a:solidFill>
                       <a:prstDash val="solid"/>
+                      <a:round/>
+                      <a:headEnd type="none" w="med" len="med"/>
+                      <a:tailEnd type="none" w="med" len="med"/>
                     </a:lnB>
                     <a:solidFill>
                       <a:schemeClr val="accent2"/>
@@ -8220,22 +8369,22 @@
                     <a:bodyPr/>
                     <a:lstStyle/>
                     <a:p>
-                      <a:pPr algn="ctr" rtl="0" fontAlgn="ctr">
+                      <a:pPr algn="ctr" fontAlgn="b">
                         <a:buNone/>
                       </a:pPr>
                       <a:r>
-                        <a:rPr lang="ru-RU" sz="1100" b="0" i="0" u="none" strike="noStrike" cap="none" spc="0">
+                        <a:rPr lang="ru-RU" sz="1100" b="0" i="0" u="none" strike="noStrike" dirty="0">
                           <a:solidFill>
-                            <a:schemeClr val="tx1"/>
+                            <a:srgbClr val="000000"/>
                           </a:solidFill>
                           <a:effectLst/>
                           <a:latin typeface="+mn-lt"/>
                         </a:rPr>
-                        <a:t>0.833</a:t>
+                        <a:t>0.80</a:t>
                       </a:r>
                     </a:p>
                   </a:txBody>
-                  <a:tcPr marL="5230" marR="5230" marT="63135" marB="54858" anchor="ctr">
+                  <a:tcPr marL="6350" marR="6350" marT="6350" marB="0" anchor="ctr">
                     <a:lnL w="12700" cmpd="sng">
                       <a:noFill/>
                       <a:prstDash val="solid"/>
@@ -8274,22 +8423,22 @@
                     <a:bodyPr/>
                     <a:lstStyle/>
                     <a:p>
-                      <a:pPr algn="ctr" rtl="0" fontAlgn="ctr">
+                      <a:pPr algn="ctr" fontAlgn="b">
                         <a:buNone/>
                       </a:pPr>
                       <a:r>
-                        <a:rPr lang="ru-RU" sz="1100" b="0" i="0" u="none" strike="noStrike" cap="none" spc="0" dirty="0">
+                        <a:rPr lang="ru-RU" sz="1100" b="0" i="0" u="none" strike="noStrike" dirty="0">
                           <a:solidFill>
-                            <a:schemeClr val="tx1"/>
+                            <a:srgbClr val="000000"/>
                           </a:solidFill>
                           <a:effectLst/>
                           <a:latin typeface="+mn-lt"/>
                         </a:rPr>
-                        <a:t>0.444</a:t>
+                        <a:t>0.40</a:t>
                       </a:r>
                     </a:p>
                   </a:txBody>
-                  <a:tcPr marL="5230" marR="5230" marT="63135" marB="54858" anchor="ctr">
+                  <a:tcPr marL="6350" marR="6350" marT="6350" marB="0" anchor="ctr">
                     <a:lnL w="12700" cmpd="sng">
                       <a:noFill/>
                       <a:prstDash val="solid"/>
@@ -8328,22 +8477,22 @@
                     <a:bodyPr/>
                     <a:lstStyle/>
                     <a:p>
-                      <a:pPr algn="ctr" rtl="0" fontAlgn="ctr">
+                      <a:pPr algn="ctr" fontAlgn="b">
                         <a:buNone/>
                       </a:pPr>
                       <a:r>
-                        <a:rPr lang="ru-RU" sz="1100" b="0" i="0" u="none" strike="noStrike" cap="none" spc="0" dirty="0">
+                        <a:rPr lang="ru-RU" sz="1100" b="0" i="0" u="none" strike="noStrike">
                           <a:solidFill>
-                            <a:schemeClr val="tx1"/>
+                            <a:srgbClr val="000000"/>
                           </a:solidFill>
                           <a:effectLst/>
                           <a:latin typeface="+mn-lt"/>
                         </a:rPr>
-                        <a:t>0.695</a:t>
+                        <a:t>0.72</a:t>
                       </a:r>
                     </a:p>
                   </a:txBody>
-                  <a:tcPr marL="5230" marR="5230" marT="63135" marB="54858" anchor="ctr">
+                  <a:tcPr marL="6350" marR="6350" marT="6350" marB="0" anchor="ctr">
                     <a:lnL w="12700" cmpd="sng">
                       <a:noFill/>
                       <a:prstDash val="solid"/>
@@ -8382,22 +8531,22 @@
                     <a:bodyPr/>
                     <a:lstStyle/>
                     <a:p>
-                      <a:pPr algn="ctr" rtl="0" fontAlgn="ctr">
+                      <a:pPr algn="ctr" fontAlgn="b">
                         <a:buNone/>
                       </a:pPr>
                       <a:r>
-                        <a:rPr lang="ru-RU" sz="1100" b="0" i="0" u="none" strike="noStrike" cap="none" spc="0" dirty="0">
+                        <a:rPr lang="ru-RU" sz="1100" b="0" i="0" u="none" strike="noStrike">
                           <a:solidFill>
-                            <a:schemeClr val="tx1"/>
+                            <a:srgbClr val="000000"/>
                           </a:solidFill>
                           <a:effectLst/>
                           <a:latin typeface="+mn-lt"/>
                         </a:rPr>
-                        <a:t>0.541</a:t>
+                        <a:t>0.51</a:t>
                       </a:r>
                     </a:p>
                   </a:txBody>
-                  <a:tcPr marL="5230" marR="5230" marT="63135" marB="54858" anchor="ctr">
+                  <a:tcPr marL="6350" marR="6350" marT="6350" marB="0" anchor="ctr">
                     <a:lnL w="12700" cmpd="sng">
                       <a:noFill/>
                       <a:prstDash val="solid"/>
@@ -8436,22 +8585,22 @@
                     <a:bodyPr/>
                     <a:lstStyle/>
                     <a:p>
-                      <a:pPr algn="ctr" rtl="0" fontAlgn="ctr">
+                      <a:pPr algn="ctr" fontAlgn="b">
                         <a:buNone/>
                       </a:pPr>
                       <a:r>
-                        <a:rPr lang="ru-RU" sz="1100" b="0" i="0" u="none" strike="noStrike" cap="none" spc="0">
+                        <a:rPr lang="ru-RU" sz="1100" b="0" i="0" u="none" strike="noStrike">
                           <a:solidFill>
-                            <a:schemeClr val="tx1"/>
+                            <a:srgbClr val="000000"/>
                           </a:solidFill>
                           <a:effectLst/>
                           <a:latin typeface="+mn-lt"/>
                         </a:rPr>
-                        <a:t>0.876</a:t>
+                        <a:t>0.86</a:t>
                       </a:r>
                     </a:p>
                   </a:txBody>
-                  <a:tcPr marL="5230" marR="5230" marT="63135" marB="54858" anchor="ctr">
+                  <a:tcPr marL="6350" marR="6350" marT="6350" marB="0" anchor="ctr">
                     <a:lnL w="12700" cmpd="sng">
                       <a:noFill/>
                       <a:prstDash val="solid"/>
@@ -8490,22 +8639,22 @@
                     <a:bodyPr/>
                     <a:lstStyle/>
                     <a:p>
-                      <a:pPr algn="ctr" rtl="0" fontAlgn="ctr">
+                      <a:pPr algn="ctr" fontAlgn="b">
                         <a:buNone/>
                       </a:pPr>
                       <a:r>
-                        <a:rPr lang="ru-RU" sz="1100" b="0" i="0" u="none" strike="noStrike" cap="none" spc="0">
+                        <a:rPr lang="ru-RU" sz="1100" b="0" i="0" u="none" strike="noStrike">
                           <a:solidFill>
-                            <a:schemeClr val="tx1"/>
+                            <a:srgbClr val="000000"/>
                           </a:solidFill>
                           <a:effectLst/>
                           <a:latin typeface="+mn-lt"/>
                         </a:rPr>
-                        <a:t>0.578</a:t>
+                        <a:t>0.52</a:t>
                       </a:r>
                     </a:p>
                   </a:txBody>
-                  <a:tcPr marL="5230" marR="5230" marT="63135" marB="54858" anchor="ctr">
+                  <a:tcPr marL="6350" marR="6350" marT="6350" marB="0" anchor="ctr">
                     <a:lnL w="12700" cmpd="sng">
                       <a:noFill/>
                       <a:prstDash val="solid"/>
@@ -8605,22 +8754,22 @@
                     <a:bodyPr/>
                     <a:lstStyle/>
                     <a:p>
-                      <a:pPr algn="ctr" rtl="0" fontAlgn="ctr">
+                      <a:pPr algn="ctr" fontAlgn="b">
                         <a:buNone/>
                       </a:pPr>
                       <a:r>
-                        <a:rPr lang="ru-RU" sz="1100" b="0" i="0" u="none" strike="noStrike" cap="none" spc="0" dirty="0">
+                        <a:rPr lang="ru-RU" sz="1100" b="0" i="0" u="none" strike="noStrike" dirty="0">
                           <a:solidFill>
-                            <a:schemeClr val="tx1"/>
+                            <a:srgbClr val="000000"/>
                           </a:solidFill>
                           <a:effectLst/>
                           <a:latin typeface="+mn-lt"/>
                         </a:rPr>
-                        <a:t>0.763</a:t>
+                        <a:t>0.76</a:t>
                       </a:r>
                     </a:p>
                   </a:txBody>
-                  <a:tcPr marL="5230" marR="5230" marT="63135" marB="54858" anchor="ctr">
+                  <a:tcPr marL="6350" marR="6350" marT="6350" marB="0" anchor="ctr">
                     <a:lnL w="12700" cmpd="sng">
                       <a:noFill/>
                       <a:prstDash val="solid"/>
@@ -8659,22 +8808,22 @@
                     <a:bodyPr/>
                     <a:lstStyle/>
                     <a:p>
-                      <a:pPr algn="ctr" rtl="0" fontAlgn="ctr">
+                      <a:pPr algn="ctr" fontAlgn="b">
                         <a:buNone/>
                       </a:pPr>
                       <a:r>
-                        <a:rPr lang="ru-RU" sz="1100" b="0" i="0" u="none" strike="noStrike" cap="none" spc="0">
+                        <a:rPr lang="ru-RU" sz="1100" b="0" i="0" u="none" strike="noStrike" dirty="0">
                           <a:solidFill>
-                            <a:schemeClr val="tx1"/>
+                            <a:srgbClr val="000000"/>
                           </a:solidFill>
                           <a:effectLst/>
                           <a:latin typeface="+mn-lt"/>
                         </a:rPr>
-                        <a:t>0.351</a:t>
+                        <a:t>0.35</a:t>
                       </a:r>
                     </a:p>
                   </a:txBody>
-                  <a:tcPr marL="5230" marR="5230" marT="63135" marB="54858" anchor="ctr">
+                  <a:tcPr marL="6350" marR="6350" marT="6350" marB="0" anchor="ctr">
                     <a:lnL w="12700" cmpd="sng">
                       <a:noFill/>
                       <a:prstDash val="solid"/>
@@ -8713,22 +8862,22 @@
                     <a:bodyPr/>
                     <a:lstStyle/>
                     <a:p>
-                      <a:pPr algn="ctr" rtl="0" fontAlgn="ctr">
+                      <a:pPr algn="ctr" fontAlgn="b">
                         <a:buNone/>
                       </a:pPr>
                       <a:r>
-                        <a:rPr lang="ru-RU" sz="1100" b="0" i="0" u="none" strike="noStrike" cap="none" spc="0" dirty="0">
+                        <a:rPr lang="ru-RU" sz="1100" b="0" i="0" u="none" strike="noStrike" dirty="0">
                           <a:solidFill>
-                            <a:schemeClr val="tx1"/>
+                            <a:srgbClr val="000000"/>
                           </a:solidFill>
                           <a:effectLst/>
                           <a:latin typeface="+mn-lt"/>
                         </a:rPr>
-                        <a:t>0.786</a:t>
+                        <a:t>0.79</a:t>
                       </a:r>
                     </a:p>
                   </a:txBody>
-                  <a:tcPr marL="5230" marR="5230" marT="63135" marB="54858" anchor="ctr">
+                  <a:tcPr marL="6350" marR="6350" marT="6350" marB="0" anchor="ctr">
                     <a:lnL w="12700" cmpd="sng">
                       <a:noFill/>
                       <a:prstDash val="solid"/>
@@ -8767,22 +8916,22 @@
                     <a:bodyPr/>
                     <a:lstStyle/>
                     <a:p>
-                      <a:pPr algn="ctr" rtl="0" fontAlgn="ctr">
+                      <a:pPr algn="ctr" fontAlgn="b">
                         <a:buNone/>
                       </a:pPr>
                       <a:r>
-                        <a:rPr lang="ru-RU" sz="1100" b="0" i="0" u="none" strike="noStrike" cap="none" spc="0" dirty="0">
+                        <a:rPr lang="ru-RU" sz="1100" b="0" i="0" u="none" strike="noStrike" dirty="0">
                           <a:solidFill>
-                            <a:schemeClr val="tx1"/>
+                            <a:srgbClr val="000000"/>
                           </a:solidFill>
                           <a:effectLst/>
                           <a:latin typeface="+mn-lt"/>
                         </a:rPr>
-                        <a:t>0.486</a:t>
+                        <a:t>0.49</a:t>
                       </a:r>
                     </a:p>
                   </a:txBody>
-                  <a:tcPr marL="5230" marR="5230" marT="63135" marB="54858" anchor="ctr">
+                  <a:tcPr marL="6350" marR="6350" marT="6350" marB="0" anchor="ctr">
                     <a:lnL w="12700" cmpd="sng">
                       <a:noFill/>
                       <a:prstDash val="solid"/>
@@ -8821,22 +8970,22 @@
                     <a:bodyPr/>
                     <a:lstStyle/>
                     <a:p>
-                      <a:pPr algn="ctr" rtl="0" fontAlgn="ctr">
+                      <a:pPr algn="ctr" fontAlgn="b">
                         <a:buNone/>
                       </a:pPr>
                       <a:r>
-                        <a:rPr lang="ru-RU" sz="1100" b="0" i="0" u="none" strike="noStrike" cap="none" spc="0" dirty="0">
+                        <a:rPr lang="ru-RU" sz="1100" b="0" i="0" u="none" strike="noStrike" dirty="0">
                           <a:solidFill>
-                            <a:schemeClr val="tx1"/>
+                            <a:srgbClr val="000000"/>
                           </a:solidFill>
                           <a:effectLst/>
                           <a:latin typeface="+mn-lt"/>
                         </a:rPr>
-                        <a:t>0.843</a:t>
+                        <a:t>0.84</a:t>
                       </a:r>
                     </a:p>
                   </a:txBody>
-                  <a:tcPr marL="5230" marR="5230" marT="63135" marB="54858" anchor="ctr">
+                  <a:tcPr marL="6350" marR="6350" marT="6350" marB="0" anchor="ctr">
                     <a:lnL w="12700" cmpd="sng">
                       <a:noFill/>
                       <a:prstDash val="solid"/>
@@ -8875,22 +9024,22 @@
                     <a:bodyPr/>
                     <a:lstStyle/>
                     <a:p>
-                      <a:pPr algn="ctr" rtl="0" fontAlgn="ctr">
+                      <a:pPr algn="ctr" fontAlgn="b">
                         <a:buNone/>
                       </a:pPr>
                       <a:r>
-                        <a:rPr lang="ru-RU" sz="1100" b="0" i="0" u="none" strike="noStrike" cap="none" spc="0">
+                        <a:rPr lang="ru-RU" sz="1100" b="0" i="0" u="none" strike="noStrike">
                           <a:solidFill>
-                            <a:schemeClr val="tx1"/>
+                            <a:srgbClr val="000000"/>
                           </a:solidFill>
                           <a:effectLst/>
                           <a:latin typeface="+mn-lt"/>
                         </a:rPr>
-                        <a:t>0.449</a:t>
+                        <a:t>0.45</a:t>
                       </a:r>
                     </a:p>
                   </a:txBody>
-                  <a:tcPr marL="5230" marR="5230" marT="63135" marB="54858" anchor="ctr">
+                  <a:tcPr marL="6350" marR="6350" marT="6350" marB="0" anchor="ctr">
                     <a:lnL w="12700" cmpd="sng">
                       <a:noFill/>
                       <a:prstDash val="solid"/>
@@ -8940,7 +9089,7 @@
                         <a:buNone/>
                       </a:pPr>
                       <a:r>
-                        <a:rPr lang="en-US" sz="1100" b="0" i="0" u="none" strike="noStrike" cap="none" spc="0">
+                        <a:rPr lang="en-US" sz="1100" b="0" i="0" u="none" strike="noStrike" cap="none" spc="0" dirty="0">
                           <a:solidFill>
                             <a:schemeClr val="tx1"/>
                           </a:solidFill>
@@ -8990,22 +9139,22 @@
                     <a:bodyPr/>
                     <a:lstStyle/>
                     <a:p>
-                      <a:pPr algn="ctr" rtl="0" fontAlgn="ctr">
+                      <a:pPr algn="ctr" fontAlgn="b">
                         <a:buNone/>
                       </a:pPr>
                       <a:r>
-                        <a:rPr lang="ru-RU" sz="1100" b="0" i="0" u="none" strike="noStrike" cap="none" spc="0">
+                        <a:rPr lang="ru-RU" sz="1100" b="0" i="0" u="none" strike="noStrike">
                           <a:solidFill>
-                            <a:schemeClr val="tx1"/>
+                            <a:srgbClr val="000000"/>
                           </a:solidFill>
                           <a:effectLst/>
                           <a:latin typeface="+mn-lt"/>
                         </a:rPr>
-                        <a:t>0.879</a:t>
+                        <a:t>0.88</a:t>
                       </a:r>
                     </a:p>
                   </a:txBody>
-                  <a:tcPr marL="5230" marR="5230" marT="63135" marB="54858" anchor="ctr">
+                  <a:tcPr marL="6350" marR="6350" marT="6350" marB="0" anchor="ctr">
                     <a:lnL w="12700" cmpd="sng">
                       <a:noFill/>
                       <a:prstDash val="solid"/>
@@ -9044,22 +9193,22 @@
                     <a:bodyPr/>
                     <a:lstStyle/>
                     <a:p>
-                      <a:pPr algn="ctr" rtl="0" fontAlgn="ctr">
+                      <a:pPr algn="ctr" fontAlgn="b">
                         <a:buNone/>
                       </a:pPr>
                       <a:r>
-                        <a:rPr lang="ru-RU" sz="1100" b="0" i="0" u="none" strike="noStrike" cap="none" spc="0" dirty="0">
+                        <a:rPr lang="ru-RU" sz="1100" b="0" i="0" u="none" strike="noStrike" dirty="0">
                           <a:solidFill>
-                            <a:schemeClr val="tx1"/>
+                            <a:srgbClr val="000000"/>
                           </a:solidFill>
                           <a:effectLst/>
                           <a:latin typeface="+mn-lt"/>
                         </a:rPr>
-                        <a:t>0.613</a:t>
+                        <a:t>0.61</a:t>
                       </a:r>
                     </a:p>
                   </a:txBody>
-                  <a:tcPr marL="5230" marR="5230" marT="63135" marB="54858" anchor="ctr">
+                  <a:tcPr marL="6350" marR="6350" marT="6350" marB="0" anchor="ctr">
                     <a:lnL w="12700" cmpd="sng">
                       <a:noFill/>
                       <a:prstDash val="solid"/>
@@ -9098,22 +9247,22 @@
                     <a:bodyPr/>
                     <a:lstStyle/>
                     <a:p>
-                      <a:pPr algn="ctr" rtl="0" fontAlgn="ctr">
+                      <a:pPr algn="ctr" fontAlgn="b">
                         <a:buNone/>
                       </a:pPr>
                       <a:r>
-                        <a:rPr lang="ru-RU" sz="1100" b="0" i="0" u="none" strike="noStrike" cap="none" spc="0">
+                        <a:rPr lang="ru-RU" sz="1100" b="0" i="0" u="none" strike="noStrike" dirty="0">
                           <a:solidFill>
-                            <a:schemeClr val="tx1"/>
+                            <a:srgbClr val="000000"/>
                           </a:solidFill>
                           <a:effectLst/>
                           <a:latin typeface="+mn-lt"/>
                         </a:rPr>
-                        <a:t>0.408</a:t>
+                        <a:t>0.41</a:t>
                       </a:r>
                     </a:p>
                   </a:txBody>
-                  <a:tcPr marL="5230" marR="5230" marT="63135" marB="54858" anchor="ctr">
+                  <a:tcPr marL="6350" marR="6350" marT="6350" marB="0" anchor="ctr">
                     <a:lnL w="12700" cmpd="sng">
                       <a:noFill/>
                       <a:prstDash val="solid"/>
@@ -9152,22 +9301,22 @@
                     <a:bodyPr/>
                     <a:lstStyle/>
                     <a:p>
-                      <a:pPr algn="ctr" rtl="0" fontAlgn="ctr">
+                      <a:pPr algn="ctr" fontAlgn="b">
                         <a:buNone/>
                       </a:pPr>
                       <a:r>
-                        <a:rPr lang="ru-RU" sz="1100" b="0" i="0" u="none" strike="noStrike" cap="none" spc="0" dirty="0">
+                        <a:rPr lang="ru-RU" sz="1100" b="0" i="0" u="none" strike="noStrike" dirty="0">
                           <a:solidFill>
-                            <a:schemeClr val="tx1"/>
+                            <a:srgbClr val="000000"/>
                           </a:solidFill>
                           <a:effectLst/>
                           <a:latin typeface="+mn-lt"/>
                         </a:rPr>
-                        <a:t>0.490</a:t>
+                        <a:t>0.49</a:t>
                       </a:r>
                     </a:p>
                   </a:txBody>
-                  <a:tcPr marL="5230" marR="5230" marT="63135" marB="54858" anchor="ctr">
+                  <a:tcPr marL="6350" marR="6350" marT="6350" marB="0" anchor="ctr">
                     <a:lnL w="12700" cmpd="sng">
                       <a:noFill/>
                       <a:prstDash val="solid"/>
@@ -9206,22 +9355,22 @@
                     <a:bodyPr/>
                     <a:lstStyle/>
                     <a:p>
-                      <a:pPr algn="ctr" rtl="0" fontAlgn="ctr">
+                      <a:pPr algn="ctr" fontAlgn="b">
                         <a:buNone/>
                       </a:pPr>
                       <a:r>
-                        <a:rPr lang="ru-RU" sz="1100" b="0" i="0" u="none" strike="noStrike" cap="none" spc="0" dirty="0">
+                        <a:rPr lang="ru-RU" sz="1100" b="0" i="0" u="none" strike="noStrike" dirty="0">
                           <a:solidFill>
-                            <a:schemeClr val="tx1"/>
+                            <a:srgbClr val="000000"/>
                           </a:solidFill>
                           <a:effectLst/>
                           <a:latin typeface="+mn-lt"/>
                         </a:rPr>
-                        <a:t>0.833</a:t>
+                        <a:t>0.83</a:t>
                       </a:r>
                     </a:p>
                   </a:txBody>
-                  <a:tcPr marL="5230" marR="5230" marT="63135" marB="54858" anchor="ctr">
+                  <a:tcPr marL="6350" marR="6350" marT="6350" marB="0" anchor="ctr">
                     <a:lnL w="12700" cmpd="sng">
                       <a:noFill/>
                       <a:prstDash val="solid"/>
@@ -9260,22 +9409,22 @@
                     <a:bodyPr/>
                     <a:lstStyle/>
                     <a:p>
-                      <a:pPr algn="ctr" rtl="0" fontAlgn="ctr">
+                      <a:pPr algn="ctr" fontAlgn="b">
                         <a:buNone/>
                       </a:pPr>
                       <a:r>
-                        <a:rPr lang="ru-RU" sz="1100" b="0" i="0" u="none" strike="noStrike" cap="none" spc="0">
+                        <a:rPr lang="ru-RU" sz="1100" b="0" i="0" u="none" strike="noStrike" dirty="0">
                           <a:solidFill>
-                            <a:schemeClr val="tx1"/>
+                            <a:srgbClr val="000000"/>
                           </a:solidFill>
                           <a:effectLst/>
                           <a:latin typeface="+mn-lt"/>
                         </a:rPr>
-                        <a:t>0.557</a:t>
+                        <a:t>0.56</a:t>
                       </a:r>
                     </a:p>
                   </a:txBody>
-                  <a:tcPr marL="5230" marR="5230" marT="63135" marB="54858" anchor="ctr">
+                  <a:tcPr marL="6350" marR="6350" marT="6350" marB="0" anchor="ctr">
                     <a:lnL w="12700" cmpd="sng">
                       <a:noFill/>
                       <a:prstDash val="solid"/>
@@ -9325,7 +9474,7 @@
                         <a:buNone/>
                       </a:pPr>
                       <a:r>
-                        <a:rPr lang="en-US" sz="1100" b="0" i="0" u="none" strike="noStrike" cap="none" spc="0">
+                        <a:rPr lang="en-US" sz="1100" b="0" i="0" u="none" strike="noStrike" cap="none" spc="0" dirty="0">
                           <a:solidFill>
                             <a:schemeClr val="tx1"/>
                           </a:solidFill>
@@ -9370,22 +9519,22 @@
                     <a:bodyPr/>
                     <a:lstStyle/>
                     <a:p>
-                      <a:pPr algn="ctr" rtl="0" fontAlgn="ctr">
+                      <a:pPr algn="ctr" fontAlgn="b">
                         <a:buNone/>
                       </a:pPr>
                       <a:r>
-                        <a:rPr lang="ru-RU" sz="1100" b="0" i="0" u="none" strike="noStrike" cap="none" spc="0">
+                        <a:rPr lang="ru-RU" sz="1100" b="0" i="0" u="none" strike="noStrike">
                           <a:solidFill>
-                            <a:schemeClr val="tx1"/>
+                            <a:srgbClr val="000000"/>
                           </a:solidFill>
                           <a:effectLst/>
                           <a:latin typeface="+mn-lt"/>
                         </a:rPr>
-                        <a:t>0.802</a:t>
+                        <a:t>0.80</a:t>
                       </a:r>
                     </a:p>
                   </a:txBody>
-                  <a:tcPr marL="5230" marR="5230" marT="63135" marB="54858" anchor="ctr">
+                  <a:tcPr marL="6350" marR="6350" marT="6350" marB="0" anchor="ctr">
                     <a:lnL w="12700" cmpd="sng">
                       <a:noFill/>
                       <a:prstDash val="solid"/>
@@ -9419,22 +9568,22 @@
                     <a:bodyPr/>
                     <a:lstStyle/>
                     <a:p>
-                      <a:pPr algn="ctr" rtl="0" fontAlgn="ctr">
+                      <a:pPr algn="ctr" fontAlgn="b">
                         <a:buNone/>
                       </a:pPr>
                       <a:r>
-                        <a:rPr lang="ru-RU" sz="1100" b="0" i="0" u="none" strike="noStrike" cap="none" spc="0" dirty="0">
+                        <a:rPr lang="ru-RU" sz="1100" b="0" i="0" u="none" strike="noStrike">
                           <a:solidFill>
-                            <a:schemeClr val="tx1"/>
+                            <a:srgbClr val="000000"/>
                           </a:solidFill>
                           <a:effectLst/>
                           <a:latin typeface="+mn-lt"/>
                         </a:rPr>
-                        <a:t>0.397</a:t>
+                        <a:t>0.40</a:t>
                       </a:r>
                     </a:p>
                   </a:txBody>
-                  <a:tcPr marL="5230" marR="5230" marT="63135" marB="54858" anchor="ctr">
+                  <a:tcPr marL="6350" marR="6350" marT="6350" marB="0" anchor="ctr">
                     <a:lnL w="12700" cmpd="sng">
                       <a:noFill/>
                       <a:prstDash val="solid"/>
@@ -9468,22 +9617,22 @@
                     <a:bodyPr/>
                     <a:lstStyle/>
                     <a:p>
-                      <a:pPr algn="ctr" rtl="0" fontAlgn="ctr">
+                      <a:pPr algn="ctr" fontAlgn="b">
                         <a:buNone/>
                       </a:pPr>
                       <a:r>
-                        <a:rPr lang="ru-RU" sz="1100" b="0" i="0" u="none" strike="noStrike" cap="none" spc="0" dirty="0">
+                        <a:rPr lang="ru-RU" sz="1100" b="0" i="0" u="none" strike="noStrike" dirty="0">
                           <a:solidFill>
-                            <a:schemeClr val="tx1"/>
+                            <a:srgbClr val="000000"/>
                           </a:solidFill>
                           <a:effectLst/>
                           <a:latin typeface="+mn-lt"/>
                         </a:rPr>
-                        <a:t>0.754</a:t>
+                        <a:t>0.75</a:t>
                       </a:r>
                     </a:p>
                   </a:txBody>
-                  <a:tcPr marL="5230" marR="5230" marT="63135" marB="54858" anchor="ctr">
+                  <a:tcPr marL="6350" marR="6350" marT="6350" marB="0" anchor="ctr">
                     <a:lnL w="12700" cmpd="sng">
                       <a:noFill/>
                       <a:prstDash val="solid"/>
@@ -9517,22 +9666,22 @@
                     <a:bodyPr/>
                     <a:lstStyle/>
                     <a:p>
-                      <a:pPr algn="ctr" rtl="0" fontAlgn="ctr">
+                      <a:pPr algn="ctr" fontAlgn="b">
                         <a:buNone/>
                       </a:pPr>
                       <a:r>
-                        <a:rPr lang="ru-RU" sz="1100" b="0" i="0" u="none" strike="noStrike" cap="none" spc="0" dirty="0">
+                        <a:rPr lang="ru-RU" sz="1100" b="0" i="0" u="none" strike="noStrike" dirty="0">
                           <a:solidFill>
-                            <a:schemeClr val="tx1"/>
+                            <a:srgbClr val="000000"/>
                           </a:solidFill>
                           <a:effectLst/>
                           <a:latin typeface="+mn-lt"/>
                         </a:rPr>
-                        <a:t>0.521</a:t>
+                        <a:t>0.52</a:t>
                       </a:r>
                     </a:p>
                   </a:txBody>
-                  <a:tcPr marL="5230" marR="5230" marT="63135" marB="54858" anchor="ctr">
+                  <a:tcPr marL="6350" marR="6350" marT="6350" marB="0" anchor="ctr">
                     <a:lnL w="12700" cmpd="sng">
                       <a:noFill/>
                       <a:prstDash val="solid"/>
@@ -9566,22 +9715,22 @@
                     <a:bodyPr/>
                     <a:lstStyle/>
                     <a:p>
-                      <a:pPr algn="ctr" rtl="0" fontAlgn="ctr">
+                      <a:pPr algn="ctr" fontAlgn="b">
                         <a:buNone/>
                       </a:pPr>
                       <a:r>
-                        <a:rPr lang="ru-RU" sz="1100" b="0" i="0" u="none" strike="noStrike" cap="none" spc="0" dirty="0">
+                        <a:rPr lang="ru-RU" sz="1100" b="0" i="0" u="none" strike="noStrike" dirty="0">
                           <a:solidFill>
-                            <a:schemeClr val="tx1"/>
+                            <a:srgbClr val="000000"/>
                           </a:solidFill>
                           <a:effectLst/>
                           <a:latin typeface="+mn-lt"/>
                         </a:rPr>
-                        <a:t>0.868</a:t>
+                        <a:t>0.87</a:t>
                       </a:r>
                     </a:p>
                   </a:txBody>
-                  <a:tcPr marL="5230" marR="5230" marT="63135" marB="54858" anchor="ctr">
+                  <a:tcPr marL="6350" marR="6350" marT="6350" marB="0" anchor="ctr">
                     <a:lnL w="12700" cmpd="sng">
                       <a:noFill/>
                       <a:prstDash val="solid"/>
@@ -9615,22 +9764,22 @@
                     <a:bodyPr/>
                     <a:lstStyle/>
                     <a:p>
-                      <a:pPr algn="ctr" rtl="0" fontAlgn="ctr">
+                      <a:pPr algn="ctr" fontAlgn="b">
                         <a:buNone/>
                       </a:pPr>
                       <a:r>
-                        <a:rPr lang="ru-RU" sz="1100" b="0" i="0" u="none" strike="noStrike" cap="none" spc="0" dirty="0">
+                        <a:rPr lang="ru-RU" sz="1100" b="0" i="0" u="none" strike="noStrike" dirty="0">
                           <a:solidFill>
-                            <a:schemeClr val="tx1"/>
+                            <a:srgbClr val="000000"/>
                           </a:solidFill>
                           <a:effectLst/>
                           <a:latin typeface="+mn-lt"/>
                         </a:rPr>
-                        <a:t>0.536</a:t>
+                        <a:t>0.54</a:t>
                       </a:r>
                     </a:p>
                   </a:txBody>
-                  <a:tcPr marL="5230" marR="5230" marT="63135" marB="54858" anchor="ctr">
+                  <a:tcPr marL="6350" marR="6350" marT="6350" marB="0" anchor="ctr">
                     <a:lnL w="12700" cmpd="sng">
                       <a:noFill/>
                       <a:prstDash val="solid"/>
@@ -9680,14 +9829,6 @@
 <file path=ppt/slides/slide15.xml><?xml version="1.0" encoding="utf-8"?>
 <p:sld xmlns:a="http://schemas.openxmlformats.org/drawingml/2006/main" xmlns:r="http://schemas.openxmlformats.org/officeDocument/2006/relationships" xmlns:p="http://schemas.openxmlformats.org/presentationml/2006/main">
   <p:cSld>
-    <p:bg>
-      <p:bgPr>
-        <a:solidFill>
-          <a:schemeClr val="bg1"/>
-        </a:solidFill>
-        <a:effectLst/>
-      </p:bgPr>
-    </p:bg>
     <p:spTree>
       <p:nvGrpSpPr>
         <p:cNvPr id="1" name=""/>
@@ -10052,41 +10193,225 @@
           </a:p>
         </p:txBody>
       </p:sp>
-      <p:sp>
-        <p:nvSpPr>
-          <p:cNvPr id="3" name="Content Placeholder 2"/>
-          <p:cNvSpPr>
-            <a:spLocks noGrp="1"/>
-          </p:cNvSpPr>
-          <p:nvPr>
-            <p:ph idx="1"/>
-          </p:nvPr>
-        </p:nvSpPr>
+      <p:pic>
+        <p:nvPicPr>
+          <p:cNvPr id="4" name="Google Shape;55;p13">
+            <a:extLst>
+              <a:ext uri="{FF2B5EF4-FFF2-40B4-BE49-F238E27FC236}">
+                <a16:creationId xmlns:a16="http://schemas.microsoft.com/office/drawing/2014/main" id="{25509EE8-D362-D45A-C02D-9509F101DEDB}"/>
+              </a:ext>
+            </a:extLst>
+          </p:cNvPr>
+          <p:cNvPicPr preferRelativeResize="0"/>
+          <p:nvPr/>
+        </p:nvPicPr>
+        <p:blipFill rotWithShape="1">
+          <a:blip r:embed="rId3">
+            <a:alphaModFix/>
+          </a:blip>
+          <a:srcRect/>
+          <a:stretch/>
+        </p:blipFill>
         <p:spPr>
           <a:xfrm>
-            <a:off x="836676" y="2481943"/>
+            <a:off x="7791316" y="304016"/>
+            <a:ext cx="860137" cy="1108802"/>
+          </a:xfrm>
+          <a:prstGeom prst="rect">
+            <a:avLst/>
+          </a:prstGeom>
+          <a:noFill/>
+          <a:ln>
+            <a:noFill/>
+          </a:ln>
+        </p:spPr>
+      </p:pic>
+      <p:sp>
+        <p:nvSpPr>
+          <p:cNvPr id="7" name="Content Placeholder 2">
+            <a:extLst>
+              <a:ext uri="{FF2B5EF4-FFF2-40B4-BE49-F238E27FC236}">
+                <a16:creationId xmlns:a16="http://schemas.microsoft.com/office/drawing/2014/main" id="{2D414F42-2313-8F4F-FEAB-4C192EE4F487}"/>
+              </a:ext>
+            </a:extLst>
+          </p:cNvPr>
+          <p:cNvSpPr>
+            <a:spLocks noGrp="1"/>
+          </p:cNvSpPr>
+          <p:nvPr/>
+        </p:nvSpPr>
+        <p:spPr>
+          <a:xfrm>
+            <a:off x="793401" y="2152990"/>
             <a:ext cx="7626096" cy="3695020"/>
           </a:xfrm>
+          <a:prstGeom prst="rect">
+            <a:avLst/>
+          </a:prstGeom>
         </p:spPr>
         <p:txBody>
-          <a:bodyPr>
+          <a:bodyPr vert="horz" lIns="91440" tIns="45720" rIns="91440" bIns="45720" rtlCol="0">
             <a:normAutofit fontScale="85000" lnSpcReduction="10000"/>
           </a:bodyPr>
-          <a:lstStyle/>
-          <a:p>
+          <a:lstStyle>
+            <a:lvl1pPr marL="342900" indent="-342900" algn="l" defTabSz="457200" rtl="0" eaLnBrk="1" latinLnBrk="0" hangingPunct="1">
+              <a:spcBef>
+                <a:spcPct val="20000"/>
+              </a:spcBef>
+              <a:buFont typeface="Arial"/>
+              <a:buChar char="•"/>
+              <a:defRPr sz="3200" kern="1200">
+                <a:solidFill>
+                  <a:schemeClr val="tx1"/>
+                </a:solidFill>
+                <a:latin typeface="+mn-lt"/>
+                <a:ea typeface="+mn-ea"/>
+                <a:cs typeface="+mn-cs"/>
+              </a:defRPr>
+            </a:lvl1pPr>
+            <a:lvl2pPr marL="742950" indent="-285750" algn="l" defTabSz="457200" rtl="0" eaLnBrk="1" latinLnBrk="0" hangingPunct="1">
+              <a:spcBef>
+                <a:spcPct val="20000"/>
+              </a:spcBef>
+              <a:buFont typeface="Arial"/>
+              <a:buChar char="–"/>
+              <a:defRPr sz="2800" kern="1200">
+                <a:solidFill>
+                  <a:schemeClr val="tx1"/>
+                </a:solidFill>
+                <a:latin typeface="+mn-lt"/>
+                <a:ea typeface="+mn-ea"/>
+                <a:cs typeface="+mn-cs"/>
+              </a:defRPr>
+            </a:lvl2pPr>
+            <a:lvl3pPr marL="1143000" indent="-228600" algn="l" defTabSz="457200" rtl="0" eaLnBrk="1" latinLnBrk="0" hangingPunct="1">
+              <a:spcBef>
+                <a:spcPct val="20000"/>
+              </a:spcBef>
+              <a:buFont typeface="Arial"/>
+              <a:buChar char="•"/>
+              <a:defRPr sz="2400" kern="1200">
+                <a:solidFill>
+                  <a:schemeClr val="tx1"/>
+                </a:solidFill>
+                <a:latin typeface="+mn-lt"/>
+                <a:ea typeface="+mn-ea"/>
+                <a:cs typeface="+mn-cs"/>
+              </a:defRPr>
+            </a:lvl3pPr>
+            <a:lvl4pPr marL="1600200" indent="-228600" algn="l" defTabSz="457200" rtl="0" eaLnBrk="1" latinLnBrk="0" hangingPunct="1">
+              <a:spcBef>
+                <a:spcPct val="20000"/>
+              </a:spcBef>
+              <a:buFont typeface="Arial"/>
+              <a:buChar char="–"/>
+              <a:defRPr sz="2000" kern="1200">
+                <a:solidFill>
+                  <a:schemeClr val="tx1"/>
+                </a:solidFill>
+                <a:latin typeface="+mn-lt"/>
+                <a:ea typeface="+mn-ea"/>
+                <a:cs typeface="+mn-cs"/>
+              </a:defRPr>
+            </a:lvl4pPr>
+            <a:lvl5pPr marL="2057400" indent="-228600" algn="l" defTabSz="457200" rtl="0" eaLnBrk="1" latinLnBrk="0" hangingPunct="1">
+              <a:spcBef>
+                <a:spcPct val="20000"/>
+              </a:spcBef>
+              <a:buFont typeface="Arial"/>
+              <a:buChar char="»"/>
+              <a:defRPr sz="2000" kern="1200">
+                <a:solidFill>
+                  <a:schemeClr val="tx1"/>
+                </a:solidFill>
+                <a:latin typeface="+mn-lt"/>
+                <a:ea typeface="+mn-ea"/>
+                <a:cs typeface="+mn-cs"/>
+              </a:defRPr>
+            </a:lvl5pPr>
+            <a:lvl6pPr marL="2514600" indent="-228600" algn="l" defTabSz="457200" rtl="0" eaLnBrk="1" latinLnBrk="0" hangingPunct="1">
+              <a:spcBef>
+                <a:spcPct val="20000"/>
+              </a:spcBef>
+              <a:buFont typeface="Arial"/>
+              <a:buChar char="•"/>
+              <a:defRPr sz="2000" kern="1200">
+                <a:solidFill>
+                  <a:schemeClr val="tx1"/>
+                </a:solidFill>
+                <a:latin typeface="+mn-lt"/>
+                <a:ea typeface="+mn-ea"/>
+                <a:cs typeface="+mn-cs"/>
+              </a:defRPr>
+            </a:lvl6pPr>
+            <a:lvl7pPr marL="2971800" indent="-228600" algn="l" defTabSz="457200" rtl="0" eaLnBrk="1" latinLnBrk="0" hangingPunct="1">
+              <a:spcBef>
+                <a:spcPct val="20000"/>
+              </a:spcBef>
+              <a:buFont typeface="Arial"/>
+              <a:buChar char="•"/>
+              <a:defRPr sz="2000" kern="1200">
+                <a:solidFill>
+                  <a:schemeClr val="tx1"/>
+                </a:solidFill>
+                <a:latin typeface="+mn-lt"/>
+                <a:ea typeface="+mn-ea"/>
+                <a:cs typeface="+mn-cs"/>
+              </a:defRPr>
+            </a:lvl7pPr>
+            <a:lvl8pPr marL="3429000" indent="-228600" algn="l" defTabSz="457200" rtl="0" eaLnBrk="1" latinLnBrk="0" hangingPunct="1">
+              <a:spcBef>
+                <a:spcPct val="20000"/>
+              </a:spcBef>
+              <a:buFont typeface="Arial"/>
+              <a:buChar char="•"/>
+              <a:defRPr sz="2000" kern="1200">
+                <a:solidFill>
+                  <a:schemeClr val="tx1"/>
+                </a:solidFill>
+                <a:latin typeface="+mn-lt"/>
+                <a:ea typeface="+mn-ea"/>
+                <a:cs typeface="+mn-cs"/>
+              </a:defRPr>
+            </a:lvl8pPr>
+            <a:lvl9pPr marL="3886200" indent="-228600" algn="l" defTabSz="457200" rtl="0" eaLnBrk="1" latinLnBrk="0" hangingPunct="1">
+              <a:spcBef>
+                <a:spcPct val="20000"/>
+              </a:spcBef>
+              <a:buFont typeface="Arial"/>
+              <a:buChar char="•"/>
+              <a:defRPr sz="2000" kern="1200">
+                <a:solidFill>
+                  <a:schemeClr val="tx1"/>
+                </a:solidFill>
+                <a:latin typeface="+mn-lt"/>
+                <a:ea typeface="+mn-ea"/>
+                <a:cs typeface="+mn-cs"/>
+              </a:defRPr>
+            </a:lvl9pPr>
+          </a:lstStyle>
+          <a:p>
+            <a:pPr marL="87312" indent="0">
+              <a:buNone/>
+            </a:pPr>
             <a:r>
               <a:rPr lang="ru-RU" sz="1900" dirty="0"/>
               <a:t>Протестированы 4 модели:</a:t>
             </a:r>
           </a:p>
           <a:p>
+            <a:pPr indent="-255588"/>
             <a:r>
               <a:rPr lang="ru-RU" sz="1900" dirty="0"/>
-              <a:t>• </a:t>
+              <a:t> </a:t>
+            </a:r>
+            <a:r>
+              <a:rPr lang="en-US" sz="1900" b="1" dirty="0"/>
+              <a:t>Logistic Regression</a:t>
             </a:r>
             <a:r>
               <a:rPr lang="en-US" sz="1900" dirty="0"/>
-              <a:t>Logistic Regression — </a:t>
+              <a:t> — </a:t>
             </a:r>
             <a:r>
               <a:rPr lang="ru-RU" sz="1900" dirty="0"/>
@@ -10094,13 +10419,18 @@
             </a:r>
           </a:p>
           <a:p>
+            <a:pPr indent="-255588"/>
             <a:r>
               <a:rPr lang="ru-RU" sz="1900" dirty="0"/>
-              <a:t>• </a:t>
+              <a:t> </a:t>
+            </a:r>
+            <a:r>
+              <a:rPr lang="en-US" sz="1900" b="1" dirty="0"/>
+              <a:t>Decision Tree</a:t>
             </a:r>
             <a:r>
               <a:rPr lang="en-US" sz="1900" dirty="0"/>
-              <a:t>Decision Tree — </a:t>
+              <a:t> — </a:t>
             </a:r>
             <a:r>
               <a:rPr lang="ru-RU" sz="1900" dirty="0"/>
@@ -10116,13 +10446,18 @@
             </a:r>
           </a:p>
           <a:p>
+            <a:pPr indent="-255588"/>
             <a:r>
               <a:rPr lang="ru-RU" sz="1900" dirty="0"/>
-              <a:t>• </a:t>
+              <a:t> </a:t>
+            </a:r>
+            <a:r>
+              <a:rPr lang="en-US" sz="1900" b="1" dirty="0"/>
+              <a:t>Random Forest</a:t>
             </a:r>
             <a:r>
               <a:rPr lang="en-US" sz="1900" dirty="0"/>
-              <a:t>Random Forest — </a:t>
+              <a:t> — </a:t>
             </a:r>
             <a:r>
               <a:rPr lang="ru-RU" sz="1900" dirty="0"/>
@@ -10142,9 +10477,18 @@
             </a:r>
           </a:p>
           <a:p>
+            <a:pPr indent="-255588"/>
             <a:r>
               <a:rPr lang="en-US" sz="1900" dirty="0"/>
-              <a:t>• CatBoost — </a:t>
+              <a:t> </a:t>
+            </a:r>
+            <a:r>
+              <a:rPr lang="en-US" sz="1900" b="1" dirty="0"/>
+              <a:t>CatBoost</a:t>
+            </a:r>
+            <a:r>
+              <a:rPr lang="en-US" sz="1900" dirty="0"/>
+              <a:t> — </a:t>
             </a:r>
             <a:r>
               <a:rPr lang="ru-RU" sz="1900" dirty="0"/>
@@ -10168,18 +10512,23 @@
             </a:r>
           </a:p>
           <a:p>
+            <a:pPr indent="-255588"/>
             <a:endParaRPr lang="ru-RU" sz="1900" dirty="0"/>
           </a:p>
           <a:p>
+            <a:pPr marL="87312" indent="0">
+              <a:buNone/>
+            </a:pPr>
             <a:r>
               <a:rPr lang="ru-RU" sz="1900" dirty="0"/>
               <a:t>Выбор модели зависит от приоритета:</a:t>
             </a:r>
           </a:p>
           <a:p>
+            <a:pPr indent="-255588"/>
             <a:r>
               <a:rPr lang="ru-RU" sz="1900" dirty="0"/>
-              <a:t>• интерпретация — </a:t>
+              <a:t> интерпретация — </a:t>
             </a:r>
             <a:r>
               <a:rPr lang="en-US" sz="1900" dirty="0"/>
@@ -10187,9 +10536,10 @@
             </a:r>
           </a:p>
           <a:p>
+            <a:pPr indent="-255588"/>
             <a:r>
               <a:rPr lang="en-US" sz="1900" dirty="0"/>
-              <a:t>• </a:t>
+              <a:t> </a:t>
             </a:r>
             <a:r>
               <a:rPr lang="ru-RU" sz="1900" dirty="0"/>
@@ -10201,9 +10551,10 @@
             </a:r>
           </a:p>
           <a:p>
+            <a:pPr indent="-255588"/>
             <a:r>
               <a:rPr lang="en-US" sz="1900" dirty="0"/>
-              <a:t>• </a:t>
+              <a:t> </a:t>
             </a:r>
             <a:r>
               <a:rPr lang="ru-RU" sz="1900" dirty="0"/>
@@ -10215,9 +10566,13 @@
             </a:r>
           </a:p>
           <a:p>
+            <a:pPr indent="-255588"/>
             <a:endParaRPr lang="en-US" sz="1900" dirty="0"/>
           </a:p>
           <a:p>
+            <a:pPr marL="180975" indent="0">
+              <a:buNone/>
+            </a:pPr>
             <a:r>
               <a:rPr lang="ru-RU" sz="1900" dirty="0"/>
               <a:t>Итог: насыщенность инфраструктурой (</a:t>
@@ -10249,14 +10604,6 @@
 <file path=ppt/slides/slide16.xml><?xml version="1.0" encoding="utf-8"?>
 <p:sld xmlns:a="http://schemas.openxmlformats.org/drawingml/2006/main" xmlns:r="http://schemas.openxmlformats.org/officeDocument/2006/relationships" xmlns:p="http://schemas.openxmlformats.org/presentationml/2006/main">
   <p:cSld>
-    <p:bg>
-      <p:bgPr>
-        <a:solidFill>
-          <a:schemeClr val="bg1"/>
-        </a:solidFill>
-        <a:effectLst/>
-      </p:bgPr>
-    </p:bg>
     <p:spTree>
       <p:nvGrpSpPr>
         <p:cNvPr id="1" name=""/>
@@ -10635,25 +10982,28 @@
           </a:bodyPr>
           <a:lstStyle/>
           <a:p>
+            <a:pPr indent="-255588"/>
             <a:r>
               <a:rPr lang="ru-RU" sz="1900" dirty="0"/>
               <a:t>На карте Москвы показаны предсказанные вероятности наличия банкомата (CatBoost).</a:t>
             </a:r>
           </a:p>
           <a:p>
+            <a:pPr indent="-255588"/>
             <a:r>
               <a:rPr lang="ru-RU" sz="1900" dirty="0"/>
               <a:t>Тёмные зоны соответствуют районам с высокой вероятностью — в основном центр и крупные транспортные узлы.</a:t>
             </a:r>
           </a:p>
           <a:p>
+            <a:pPr indent="-255588"/>
             <a:r>
               <a:rPr lang="ru-RU" sz="1900" dirty="0"/>
               <a:t>Светлые зоны отражают низкую вероятность, то есть «пустые» или жилые районы.</a:t>
             </a:r>
           </a:p>
           <a:p>
-            <a:pPr marL="0" indent="0">
+            <a:pPr indent="-255588">
               <a:buNone/>
             </a:pPr>
             <a:endParaRPr lang="ru-RU" sz="1900" dirty="0"/>
@@ -10722,14 +11072,6 @@
 <file path=ppt/slides/slide17.xml><?xml version="1.0" encoding="utf-8"?>
 <p:sld xmlns:a="http://schemas.openxmlformats.org/drawingml/2006/main" xmlns:r="http://schemas.openxmlformats.org/officeDocument/2006/relationships" xmlns:p="http://schemas.openxmlformats.org/presentationml/2006/main">
   <p:cSld>
-    <p:bg>
-      <p:bgPr>
-        <a:solidFill>
-          <a:schemeClr val="bg1"/>
-        </a:solidFill>
-        <a:effectLst/>
-      </p:bgPr>
-    </p:bg>
     <p:spTree>
       <p:nvGrpSpPr>
         <p:cNvPr id="1" name=""/>
@@ -11102,25 +11444,54 @@
         </p:nvSpPr>
         <p:spPr>
           <a:xfrm>
-            <a:off x="836676" y="2481943"/>
-            <a:ext cx="7626096" cy="3695020"/>
+            <a:off x="908253" y="2276856"/>
+            <a:ext cx="7396392" cy="4123943"/>
           </a:xfrm>
         </p:spPr>
         <p:txBody>
-          <a:bodyPr>
-            <a:normAutofit/>
+          <a:bodyPr vert="horz" lIns="91440" tIns="45720" rIns="91440" bIns="45720" rtlCol="0">
+            <a:normAutofit fontScale="77500" lnSpcReduction="20000"/>
           </a:bodyPr>
           <a:lstStyle/>
           <a:p>
+            <a:pPr marL="268288" indent="0">
+              <a:spcAft>
+                <a:spcPts val="300"/>
+              </a:spcAft>
+              <a:buNone/>
+            </a:pPr>
             <a:r>
               <a:rPr lang="ru-RU" sz="1900" dirty="0"/>
-              <a:t>Подтверждена связь инфраструктуры и наличия банкоматов; признаки адекватны.</a:t>
-            </a:r>
-          </a:p>
-          <a:p>
+              <a:t>Подтверждена гипотеза</a:t>
+            </a:r>
+          </a:p>
+          <a:p>
+            <a:pPr indent="-161925"/>
             <a:r>
               <a:rPr lang="ru-RU" sz="1900" dirty="0"/>
-              <a:t>Модели дают пригодное ранжирование: CatBoost — максимум </a:t>
+              <a:t>Наличие банкоматов зависит от инфраструктуры. Лучшие признаки: POI суммарно (0.50), аптеки (0.38), кафе (0.37)</a:t>
+            </a:r>
+          </a:p>
+          <a:p>
+            <a:endParaRPr lang="ru-RU" sz="1900" dirty="0"/>
+          </a:p>
+          <a:p>
+            <a:pPr marL="268288" indent="0">
+              <a:spcAft>
+                <a:spcPts val="300"/>
+              </a:spcAft>
+              <a:buNone/>
+            </a:pPr>
+            <a:r>
+              <a:rPr lang="ru-RU" sz="1900" dirty="0"/>
+              <a:t>Выбраны модели под бизнес-задачи</a:t>
+            </a:r>
+          </a:p>
+          <a:p>
+            <a:pPr indent="-161925"/>
+            <a:r>
+              <a:rPr lang="ru-RU" sz="1900" dirty="0"/>
+              <a:t> CatBoost — максимальный охват (</a:t>
             </a:r>
             <a:r>
               <a:rPr lang="ru-RU" sz="1900" dirty="0" err="1"/>
@@ -11128,23 +11499,155 @@
             </a:r>
             <a:r>
               <a:rPr lang="ru-RU" sz="1900" dirty="0"/>
-              <a:t>/ROC-AUC, RF — Precision/PR-AUC.</a:t>
-            </a:r>
-          </a:p>
-          <a:p>
+              <a:t>: 0.75)</a:t>
+            </a:r>
+          </a:p>
+          <a:p>
+            <a:pPr indent="-161925"/>
             <a:r>
               <a:rPr lang="ru-RU" sz="1900" dirty="0"/>
-              <a:t>Карта показывает кластеры у транспорта; анти-топы — зоны для пилотов.</a:t>
-            </a:r>
-          </a:p>
-          <a:p>
+              <a:t> </a:t>
+            </a:r>
+            <a:r>
+              <a:rPr lang="ru-RU" sz="1900" dirty="0" err="1"/>
+              <a:t>Random</a:t>
+            </a:r>
             <a:r>
               <a:rPr lang="ru-RU" sz="1900" dirty="0"/>
-              <a:t>Дальнейшее развитие: новые источники (население, пассажиропотоки), дообучение, интерактивный дашборд.</a:t>
-            </a:r>
-          </a:p>
-        </p:txBody>
-      </p:sp>
+              <a:t> </a:t>
+            </a:r>
+            <a:r>
+              <a:rPr lang="ru-RU" sz="1900" dirty="0" err="1"/>
+              <a:t>Forest</a:t>
+            </a:r>
+            <a:r>
+              <a:rPr lang="ru-RU" sz="1900" dirty="0"/>
+              <a:t> — высокая точность (Precision: 0.61)</a:t>
+            </a:r>
+          </a:p>
+          <a:p>
+            <a:endParaRPr lang="ru-RU" sz="1900" dirty="0"/>
+          </a:p>
+          <a:p>
+            <a:pPr indent="0">
+              <a:spcAft>
+                <a:spcPts val="300"/>
+              </a:spcAft>
+              <a:buNone/>
+            </a:pPr>
+            <a:r>
+              <a:rPr lang="ru-RU" sz="1900" dirty="0"/>
+              <a:t>Визуальная аналитика</a:t>
+            </a:r>
+          </a:p>
+          <a:p>
+            <a:pPr indent="-161925"/>
+            <a:r>
+              <a:rPr lang="ru-RU" sz="1900" dirty="0"/>
+              <a:t> Темные зоны (центр, транспорт) — захват лидерства</a:t>
+            </a:r>
+          </a:p>
+          <a:p>
+            <a:pPr indent="-161925"/>
+            <a:r>
+              <a:rPr lang="ru-RU" sz="1900" dirty="0"/>
+              <a:t> Светлые зоны (окраины) — пилотные проекты</a:t>
+            </a:r>
+          </a:p>
+          <a:p>
+            <a:endParaRPr lang="ru-RU" sz="1900" dirty="0"/>
+          </a:p>
+          <a:p>
+            <a:pPr indent="0">
+              <a:spcAft>
+                <a:spcPts val="300"/>
+              </a:spcAft>
+              <a:buNone/>
+            </a:pPr>
+            <a:r>
+              <a:rPr lang="ru-RU" sz="1900" dirty="0"/>
+              <a:t>Дальнейшие шаги</a:t>
+            </a:r>
+          </a:p>
+          <a:p>
+            <a:pPr indent="-161925"/>
+            <a:r>
+              <a:rPr lang="ru-RU" sz="1900" dirty="0"/>
+              <a:t> Новые данные: пассажиропоток, население</a:t>
+            </a:r>
+          </a:p>
+          <a:p>
+            <a:pPr indent="-161925"/>
+            <a:r>
+              <a:rPr lang="ru-RU" sz="1900" dirty="0"/>
+              <a:t> Интерактивный дашборд</a:t>
+            </a:r>
+          </a:p>
+          <a:p>
+            <a:pPr indent="-161925"/>
+            <a:r>
+              <a:rPr lang="ru-RU" sz="1900" dirty="0"/>
+              <a:t> Развитие ML-модели (</a:t>
+            </a:r>
+            <a:r>
+              <a:rPr lang="ru-RU" sz="1900" dirty="0" err="1"/>
+              <a:t>XGBoost</a:t>
+            </a:r>
+            <a:r>
+              <a:rPr lang="ru-RU" sz="1900" dirty="0"/>
+              <a:t>, </a:t>
+            </a:r>
+            <a:r>
+              <a:rPr lang="ru-RU" sz="1900" dirty="0" err="1"/>
+              <a:t>LightGBM</a:t>
+            </a:r>
+            <a:r>
+              <a:rPr lang="ru-RU" sz="1900" dirty="0"/>
+              <a:t>)</a:t>
+            </a:r>
+          </a:p>
+          <a:p>
+            <a:pPr indent="-161925"/>
+            <a:r>
+              <a:rPr lang="ru-RU" sz="1900" dirty="0"/>
+              <a:t> Дообучение на новых данных</a:t>
+            </a:r>
+          </a:p>
+        </p:txBody>
+      </p:sp>
+      <p:pic>
+        <p:nvPicPr>
+          <p:cNvPr id="4" name="Google Shape;55;p13">
+            <a:extLst>
+              <a:ext uri="{FF2B5EF4-FFF2-40B4-BE49-F238E27FC236}">
+                <a16:creationId xmlns:a16="http://schemas.microsoft.com/office/drawing/2014/main" id="{A69D96C1-F527-447B-A8E9-CECDDA97508F}"/>
+              </a:ext>
+            </a:extLst>
+          </p:cNvPr>
+          <p:cNvPicPr preferRelativeResize="0"/>
+          <p:nvPr/>
+        </p:nvPicPr>
+        <p:blipFill rotWithShape="1">
+          <a:blip r:embed="rId3">
+            <a:alphaModFix/>
+          </a:blip>
+          <a:srcRect/>
+          <a:stretch/>
+        </p:blipFill>
+        <p:spPr>
+          <a:xfrm>
+            <a:off x="7791316" y="304016"/>
+            <a:ext cx="860137" cy="1108802"/>
+          </a:xfrm>
+          <a:prstGeom prst="rect">
+            <a:avLst/>
+          </a:prstGeom>
+          <a:noFill/>
+          <a:ln>
+            <a:noFill/>
+          </a:ln>
+        </p:spPr>
+      </p:pic>
     </p:spTree>
   </p:cSld>
   <p:clrMapOvr>
@@ -11156,14 +11659,6 @@
 <file path=ppt/slides/slide2.xml><?xml version="1.0" encoding="utf-8"?>
 <p:sld xmlns:a="http://schemas.openxmlformats.org/drawingml/2006/main" xmlns:r="http://schemas.openxmlformats.org/officeDocument/2006/relationships" xmlns:p="http://schemas.openxmlformats.org/presentationml/2006/main">
   <p:cSld>
-    <p:bg>
-      <p:bgPr>
-        <a:solidFill>
-          <a:schemeClr val="bg1"/>
-        </a:solidFill>
-        <a:effectLst/>
-      </p:bgPr>
-    </p:bg>
     <p:spTree>
       <p:nvGrpSpPr>
         <p:cNvPr id="1" name=""/>
@@ -11308,7 +11803,7 @@
               </a:lnSpc>
             </a:pPr>
             <a:r>
-              <a:rPr lang="ru-RU" sz="1500" dirty="0"/>
+              <a:rPr lang="ru-RU" sz="1500"/>
               <a:t>Итоговый проект (НИУ ВШЭ, DA-10)</a:t>
             </a:r>
           </a:p>
@@ -11319,7 +11814,7 @@
               </a:lnSpc>
             </a:pPr>
             <a:r>
-              <a:rPr lang="ru-RU" sz="1500" dirty="0"/>
+              <a:rPr lang="ru-RU" sz="1500"/>
               <a:t>Гурский Антон Анатольевич</a:t>
             </a:r>
           </a:p>
@@ -11330,9 +11825,10 @@
               </a:lnSpc>
             </a:pPr>
             <a:r>
-              <a:rPr lang="ru-RU" sz="1500" dirty="0"/>
+              <a:rPr lang="ru-RU" sz="1500"/>
               <a:t>Руководитель: Паточенко Евгений</a:t>
             </a:r>
+            <a:endParaRPr lang="ru-RU" sz="1500" dirty="0"/>
           </a:p>
         </p:txBody>
       </p:sp>
@@ -11497,6 +11993,39 @@
           </a:p>
         </p:txBody>
       </p:sp>
+      <p:pic>
+        <p:nvPicPr>
+          <p:cNvPr id="4" name="Google Shape;55;p13">
+            <a:extLst>
+              <a:ext uri="{FF2B5EF4-FFF2-40B4-BE49-F238E27FC236}">
+                <a16:creationId xmlns:a16="http://schemas.microsoft.com/office/drawing/2014/main" id="{9E6CFC02-C0EA-C049-5717-59CFD79209E9}"/>
+              </a:ext>
+            </a:extLst>
+          </p:cNvPr>
+          <p:cNvPicPr preferRelativeResize="0"/>
+          <p:nvPr/>
+        </p:nvPicPr>
+        <p:blipFill rotWithShape="1">
+          <a:blip r:embed="rId2">
+            <a:alphaModFix/>
+          </a:blip>
+          <a:srcRect/>
+          <a:stretch/>
+        </p:blipFill>
+        <p:spPr>
+          <a:xfrm>
+            <a:off x="7791316" y="304016"/>
+            <a:ext cx="860137" cy="1108802"/>
+          </a:xfrm>
+          <a:prstGeom prst="rect">
+            <a:avLst/>
+          </a:prstGeom>
+          <a:noFill/>
+          <a:ln>
+            <a:noFill/>
+          </a:ln>
+        </p:spPr>
+      </p:pic>
     </p:spTree>
   </p:cSld>
   <p:clrMapOvr>
@@ -11508,14 +12037,6 @@
 <file path=ppt/slides/slide3.xml><?xml version="1.0" encoding="utf-8"?>
 <p:sld xmlns:a="http://schemas.openxmlformats.org/drawingml/2006/main" xmlns:r="http://schemas.openxmlformats.org/officeDocument/2006/relationships" xmlns:p="http://schemas.openxmlformats.org/presentationml/2006/main">
   <p:cSld>
-    <p:bg>
-      <p:bgPr>
-        <a:solidFill>
-          <a:schemeClr val="bg1"/>
-        </a:solidFill>
-        <a:effectLst/>
-      </p:bgPr>
-    </p:bg>
     <p:spTree>
       <p:nvGrpSpPr>
         <p:cNvPr id="1" name=""/>
@@ -11899,24 +12420,57 @@
           <a:lstStyle/>
           <a:p>
             <a:r>
-              <a:rPr lang="ru-RU" sz="1900"/>
+              <a:rPr lang="ru-RU" sz="1900" dirty="0"/>
               <a:t>Банкам важно выбирать точки с максимальной отдачей — высокий трафик и рентабельность.</a:t>
             </a:r>
           </a:p>
           <a:p>
             <a:r>
-              <a:rPr lang="ru-RU" sz="1900"/>
+              <a:rPr lang="ru-RU" sz="1900" dirty="0"/>
               <a:t>Инструмент ранжирует локации, снижает ошибки и ускоряет вывод банкоматов.</a:t>
             </a:r>
           </a:p>
           <a:p>
             <a:r>
-              <a:rPr lang="ru-RU" sz="1900"/>
+              <a:rPr lang="ru-RU" sz="1900" dirty="0"/>
               <a:t>Повышение удобства для клиентов: банкоматы в шаговой доступности.</a:t>
             </a:r>
           </a:p>
         </p:txBody>
       </p:sp>
+      <p:pic>
+        <p:nvPicPr>
+          <p:cNvPr id="4" name="Google Shape;55;p13">
+            <a:extLst>
+              <a:ext uri="{FF2B5EF4-FFF2-40B4-BE49-F238E27FC236}">
+                <a16:creationId xmlns:a16="http://schemas.microsoft.com/office/drawing/2014/main" id="{EE51C417-92AE-0519-0A7B-DD4EE8B60381}"/>
+              </a:ext>
+            </a:extLst>
+          </p:cNvPr>
+          <p:cNvPicPr preferRelativeResize="0"/>
+          <p:nvPr/>
+        </p:nvPicPr>
+        <p:blipFill rotWithShape="1">
+          <a:blip r:embed="rId3">
+            <a:alphaModFix/>
+          </a:blip>
+          <a:srcRect/>
+          <a:stretch/>
+        </p:blipFill>
+        <p:spPr>
+          <a:xfrm>
+            <a:off x="7791316" y="304016"/>
+            <a:ext cx="860137" cy="1108802"/>
+          </a:xfrm>
+          <a:prstGeom prst="rect">
+            <a:avLst/>
+          </a:prstGeom>
+          <a:noFill/>
+          <a:ln>
+            <a:noFill/>
+          </a:ln>
+        </p:spPr>
+      </p:pic>
     </p:spTree>
   </p:cSld>
   <p:clrMapOvr>
@@ -11928,14 +12482,6 @@
 <file path=ppt/slides/slide4.xml><?xml version="1.0" encoding="utf-8"?>
 <p:sld xmlns:a="http://schemas.openxmlformats.org/drawingml/2006/main" xmlns:r="http://schemas.openxmlformats.org/officeDocument/2006/relationships" xmlns:p="http://schemas.openxmlformats.org/presentationml/2006/main">
   <p:cSld>
-    <p:bg>
-      <p:bgPr>
-        <a:solidFill>
-          <a:schemeClr val="bg1"/>
-        </a:solidFill>
-        <a:effectLst/>
-      </p:bgPr>
-    </p:bg>
     <p:spTree>
       <p:nvGrpSpPr>
         <p:cNvPr id="1" name=""/>
@@ -12337,6 +12883,39 @@
           </a:p>
         </p:txBody>
       </p:sp>
+      <p:pic>
+        <p:nvPicPr>
+          <p:cNvPr id="4" name="Google Shape;55;p13">
+            <a:extLst>
+              <a:ext uri="{FF2B5EF4-FFF2-40B4-BE49-F238E27FC236}">
+                <a16:creationId xmlns:a16="http://schemas.microsoft.com/office/drawing/2014/main" id="{AA565EFA-9E33-E01D-B51A-7CA63383A1CE}"/>
+              </a:ext>
+            </a:extLst>
+          </p:cNvPr>
+          <p:cNvPicPr preferRelativeResize="0"/>
+          <p:nvPr/>
+        </p:nvPicPr>
+        <p:blipFill rotWithShape="1">
+          <a:blip r:embed="rId2">
+            <a:alphaModFix/>
+          </a:blip>
+          <a:srcRect/>
+          <a:stretch/>
+        </p:blipFill>
+        <p:spPr>
+          <a:xfrm>
+            <a:off x="7791316" y="304016"/>
+            <a:ext cx="860137" cy="1108802"/>
+          </a:xfrm>
+          <a:prstGeom prst="rect">
+            <a:avLst/>
+          </a:prstGeom>
+          <a:noFill/>
+          <a:ln>
+            <a:noFill/>
+          </a:ln>
+        </p:spPr>
+      </p:pic>
     </p:spTree>
   </p:cSld>
   <p:clrMapOvr>
@@ -12348,14 +12927,6 @@
 <file path=ppt/slides/slide5.xml><?xml version="1.0" encoding="utf-8"?>
 <p:sld xmlns:a="http://schemas.openxmlformats.org/drawingml/2006/main" xmlns:r="http://schemas.openxmlformats.org/officeDocument/2006/relationships" xmlns:p="http://schemas.openxmlformats.org/presentationml/2006/main">
   <p:cSld>
-    <p:bg>
-      <p:bgPr>
-        <a:solidFill>
-          <a:schemeClr val="bg1"/>
-        </a:solidFill>
-        <a:effectLst/>
-      </p:bgPr>
-    </p:bg>
     <p:spTree>
       <p:nvGrpSpPr>
         <p:cNvPr id="1" name=""/>
@@ -12765,11 +13336,11 @@
             </a:r>
             <a:r>
               <a:rPr lang="ru-RU" sz="1900" dirty="0"/>
-              <a:t>банкоматы (</a:t>
+              <a:t>банкоматы</a:t>
             </a:r>
             <a:r>
               <a:rPr lang="en-US" sz="1900" dirty="0"/>
-              <a:t>amenity=atm), </a:t>
+              <a:t> </a:t>
             </a:r>
           </a:p>
           <a:p>
@@ -12813,6 +13384,39 @@
           </a:p>
         </p:txBody>
       </p:sp>
+      <p:pic>
+        <p:nvPicPr>
+          <p:cNvPr id="4" name="Google Shape;55;p13">
+            <a:extLst>
+              <a:ext uri="{FF2B5EF4-FFF2-40B4-BE49-F238E27FC236}">
+                <a16:creationId xmlns:a16="http://schemas.microsoft.com/office/drawing/2014/main" id="{FD7F477F-E3E7-3126-E436-01E733FEB5FA}"/>
+              </a:ext>
+            </a:extLst>
+          </p:cNvPr>
+          <p:cNvPicPr preferRelativeResize="0"/>
+          <p:nvPr/>
+        </p:nvPicPr>
+        <p:blipFill rotWithShape="1">
+          <a:blip r:embed="rId3">
+            <a:alphaModFix/>
+          </a:blip>
+          <a:srcRect/>
+          <a:stretch/>
+        </p:blipFill>
+        <p:spPr>
+          <a:xfrm>
+            <a:off x="7791316" y="304016"/>
+            <a:ext cx="860137" cy="1108802"/>
+          </a:xfrm>
+          <a:prstGeom prst="rect">
+            <a:avLst/>
+          </a:prstGeom>
+          <a:noFill/>
+          <a:ln>
+            <a:noFill/>
+          </a:ln>
+        </p:spPr>
+      </p:pic>
     </p:spTree>
   </p:cSld>
   <p:clrMapOvr>
@@ -12824,14 +13428,6 @@
 <file path=ppt/slides/slide6.xml><?xml version="1.0" encoding="utf-8"?>
 <p:sld xmlns:a="http://schemas.openxmlformats.org/drawingml/2006/main" xmlns:r="http://schemas.openxmlformats.org/officeDocument/2006/relationships" xmlns:p="http://schemas.openxmlformats.org/presentationml/2006/main">
   <p:cSld>
-    <p:bg>
-      <p:bgPr>
-        <a:solidFill>
-          <a:schemeClr val="bg1"/>
-        </a:solidFill>
-        <a:effectLst/>
-      </p:bgPr>
-    </p:bg>
     <p:spTree>
       <p:nvGrpSpPr>
         <p:cNvPr id="1" name=""/>
@@ -13215,24 +13811,63 @@
           <a:lstStyle/>
           <a:p>
             <a:r>
-              <a:rPr lang="en-US" sz="1900"/>
+              <a:rPr lang="en-US" sz="1900" dirty="0"/>
               <a:t>Python: pandas, GeoPandas, Shapely, OSMnx, matplotlib.</a:t>
             </a:r>
           </a:p>
           <a:p>
             <a:r>
-              <a:rPr lang="en-US" sz="1900"/>
+              <a:rPr lang="en-US" sz="1900" dirty="0"/>
               <a:t>ML: scikit-learn (Logistic Regression, Decision Tree, Random Forest), CatBoost.</a:t>
             </a:r>
           </a:p>
           <a:p>
             <a:r>
-              <a:rPr lang="ru-RU" sz="1900"/>
-              <a:t>Ноутбук со структурированными шагами: сбор → подготовка → признаки → модель.</a:t>
-            </a:r>
-          </a:p>
-        </p:txBody>
-      </p:sp>
+              <a:rPr lang="ru-RU" sz="1900" dirty="0"/>
+              <a:t>Ноутбук со структурированными шагами: </a:t>
+            </a:r>
+          </a:p>
+          <a:p>
+            <a:r>
+              <a:rPr lang="ru-RU" sz="1900" dirty="0"/>
+              <a:t>сбор →  подготовка →  признаки →  модель.</a:t>
+            </a:r>
+          </a:p>
+        </p:txBody>
+      </p:sp>
+      <p:pic>
+        <p:nvPicPr>
+          <p:cNvPr id="4" name="Google Shape;55;p13">
+            <a:extLst>
+              <a:ext uri="{FF2B5EF4-FFF2-40B4-BE49-F238E27FC236}">
+                <a16:creationId xmlns:a16="http://schemas.microsoft.com/office/drawing/2014/main" id="{8A579FFC-C030-AB74-E966-05A9F493F954}"/>
+              </a:ext>
+            </a:extLst>
+          </p:cNvPr>
+          <p:cNvPicPr preferRelativeResize="0"/>
+          <p:nvPr/>
+        </p:nvPicPr>
+        <p:blipFill rotWithShape="1">
+          <a:blip r:embed="rId2">
+            <a:alphaModFix/>
+          </a:blip>
+          <a:srcRect/>
+          <a:stretch/>
+        </p:blipFill>
+        <p:spPr>
+          <a:xfrm>
+            <a:off x="7791316" y="304016"/>
+            <a:ext cx="860137" cy="1108802"/>
+          </a:xfrm>
+          <a:prstGeom prst="rect">
+            <a:avLst/>
+          </a:prstGeom>
+          <a:noFill/>
+          <a:ln>
+            <a:noFill/>
+          </a:ln>
+        </p:spPr>
+      </p:pic>
     </p:spTree>
   </p:cSld>
   <p:clrMapOvr>
@@ -13244,14 +13879,6 @@
 <file path=ppt/slides/slide7.xml><?xml version="1.0" encoding="utf-8"?>
 <p:sld xmlns:a="http://schemas.openxmlformats.org/drawingml/2006/main" xmlns:r="http://schemas.openxmlformats.org/officeDocument/2006/relationships" xmlns:p="http://schemas.openxmlformats.org/presentationml/2006/main">
   <p:cSld>
-    <p:bg>
-      <p:bgPr>
-        <a:solidFill>
-          <a:schemeClr val="bg1"/>
-        </a:solidFill>
-        <a:effectLst/>
-      </p:bgPr>
-    </p:bg>
     <p:spTree>
       <p:nvGrpSpPr>
         <p:cNvPr id="1" name=""/>
@@ -13695,14 +14322,6 @@
 <file path=ppt/slides/slide8.xml><?xml version="1.0" encoding="utf-8"?>
 <p:sld xmlns:a="http://schemas.openxmlformats.org/drawingml/2006/main" xmlns:r="http://schemas.openxmlformats.org/officeDocument/2006/relationships" xmlns:p="http://schemas.openxmlformats.org/presentationml/2006/main">
   <p:cSld>
-    <p:bg>
-      <p:bgPr>
-        <a:solidFill>
-          <a:schemeClr val="bg1"/>
-        </a:solidFill>
-        <a:effectLst/>
-      </p:bgPr>
-    </p:bg>
     <p:spTree>
       <p:nvGrpSpPr>
         <p:cNvPr id="1" name=""/>
@@ -13961,13 +14580,13 @@
         </p:nvSpPr>
         <p:spPr>
           <a:xfrm>
-            <a:off x="459486" y="2935541"/>
-            <a:ext cx="4701577" cy="3047840"/>
+            <a:off x="442613" y="2364474"/>
+            <a:ext cx="4701577" cy="3437931"/>
           </a:xfrm>
         </p:spPr>
         <p:txBody>
           <a:bodyPr>
-            <a:normAutofit fontScale="92500" lnSpcReduction="20000"/>
+            <a:normAutofit fontScale="92500" lnSpcReduction="10000"/>
           </a:bodyPr>
           <a:lstStyle/>
           <a:p>
@@ -14057,12 +14676,18 @@
             <a:endParaRPr lang="ru-RU" sz="1900" dirty="0"/>
           </a:p>
           <a:p>
+            <a:pPr marL="268288" indent="0">
+              <a:buNone/>
+            </a:pPr>
             <a:r>
               <a:rPr lang="ru-RU" sz="1900" dirty="0"/>
               <a:t>Итог: </a:t>
             </a:r>
           </a:p>
           <a:p>
+            <a:pPr marL="268288" indent="0">
+              <a:buNone/>
+            </a:pPr>
             <a:r>
               <a:rPr lang="ru-RU" sz="1900" dirty="0"/>
               <a:t>датасет с признаками доступности и дисбалансом классов (реальных банкоматов меньше).</a:t>
@@ -14141,14 +14766,6 @@
 <file path=ppt/slides/slide9.xml><?xml version="1.0" encoding="utf-8"?>
 <p:sld xmlns:a="http://schemas.openxmlformats.org/drawingml/2006/main" xmlns:r="http://schemas.openxmlformats.org/officeDocument/2006/relationships" xmlns:p="http://schemas.openxmlformats.org/presentationml/2006/main">
   <p:cSld>
-    <p:bg>
-      <p:bgPr>
-        <a:solidFill>
-          <a:schemeClr val="bg1"/>
-        </a:solidFill>
-        <a:effectLst/>
-      </p:bgPr>
-    </p:bg>
     <p:spTree>
       <p:nvGrpSpPr>
         <p:cNvPr id="1" name=""/>
@@ -15676,7 +16293,7 @@
 <file path=ppt/theme/theme1.xml><?xml version="1.0" encoding="utf-8"?>
 <a:theme xmlns:a="http://schemas.openxmlformats.org/drawingml/2006/main" name="Office Theme">
   <a:themeElements>
-    <a:clrScheme name="Office">
+    <a:clrScheme name="Другая 2">
       <a:dk1>
         <a:sysClr val="windowText" lastClr="000000"/>
       </a:dk1>
@@ -15693,7 +16310,7 @@
         <a:srgbClr val="4F81BD"/>
       </a:accent1>
       <a:accent2>
-        <a:srgbClr val="C0504D"/>
+        <a:srgbClr val="FACA00"/>
       </a:accent2>
       <a:accent3>
         <a:srgbClr val="9BBB59"/>
